--- a/Hayden Bindel's web mining presi.pptx
+++ b/Hayden Bindel's web mining presi.pptx
@@ -118,7 +118,7 @@
 <file path=ppt/revisionInfo.xml><?xml version="1.0" encoding="utf-8"?>
 <p1510:revInfo xmlns:a="http://schemas.openxmlformats.org/drawingml/2006/main" xmlns:r="http://schemas.openxmlformats.org/officeDocument/2006/relationships" xmlns:p1510="http://schemas.microsoft.com/office/powerpoint/2015/10/main">
   <p1510:revLst>
-    <p1510:client id="{4D5A1F41-7241-49DD-8A75-9744BB32EEE3}" v="7" dt="2026-04-24T16:38:04.403"/>
+    <p1510:client id="{4D5A1F41-7241-49DD-8A75-9744BB32EEE3}" v="29" dt="2026-04-27T23:08:40.008"/>
   </p1510:revLst>
 </p1510:revInfo>
 </file>
@@ -128,12 +128,12 @@
   <pc:docChgLst>
     <pc:chgData name="Bindel,Hayden M" userId="054703d1-2bd2-4668-8a02-d5bbf2e4de1e" providerId="ADAL" clId="{02989CDD-321A-44E8-8B77-599C685A5192}"/>
     <pc:docChg chg="undo custSel modSld">
-      <pc:chgData name="Bindel,Hayden M" userId="054703d1-2bd2-4668-8a02-d5bbf2e4de1e" providerId="ADAL" clId="{02989CDD-321A-44E8-8B77-599C685A5192}" dt="2026-04-24T16:42:50.029" v="501" actId="14100"/>
+      <pc:chgData name="Bindel,Hayden M" userId="054703d1-2bd2-4668-8a02-d5bbf2e4de1e" providerId="ADAL" clId="{02989CDD-321A-44E8-8B77-599C685A5192}" dt="2026-04-27T23:08:55.528" v="532" actId="20577"/>
       <pc:docMkLst>
         <pc:docMk/>
       </pc:docMkLst>
-      <pc:sldChg chg="addSp modSp mod">
-        <pc:chgData name="Bindel,Hayden M" userId="054703d1-2bd2-4668-8a02-d5bbf2e4de1e" providerId="ADAL" clId="{02989CDD-321A-44E8-8B77-599C685A5192}" dt="2026-04-24T16:30:49.043" v="325" actId="313"/>
+      <pc:sldChg chg="addSp delSp modSp mod">
+        <pc:chgData name="Bindel,Hayden M" userId="054703d1-2bd2-4668-8a02-d5bbf2e4de1e" providerId="ADAL" clId="{02989CDD-321A-44E8-8B77-599C685A5192}" dt="2026-04-27T23:03:48.501" v="514" actId="1076"/>
         <pc:sldMkLst>
           <pc:docMk/>
           <pc:sldMk cId="2328655230" sldId="256"/>
@@ -144,6 +144,14 @@
             <pc:docMk/>
             <pc:sldMk cId="2328655230" sldId="256"/>
             <ac:spMk id="2" creationId="{09D51D5F-3EF5-4FA0-8DCD-F5714DD07997}"/>
+          </ac:spMkLst>
+        </pc:spChg>
+        <pc:spChg chg="del">
+          <ac:chgData name="Bindel,Hayden M" userId="054703d1-2bd2-4668-8a02-d5bbf2e4de1e" providerId="ADAL" clId="{02989CDD-321A-44E8-8B77-599C685A5192}" dt="2026-04-27T23:02:18.949" v="502"/>
+          <ac:spMkLst>
+            <pc:docMk/>
+            <pc:sldMk cId="2328655230" sldId="256"/>
+            <ac:spMk id="3" creationId="{DF611C5B-6CA3-41B7-A609-6C0419D56703}"/>
           </ac:spMkLst>
         </pc:spChg>
         <pc:spChg chg="mod">
@@ -178,8 +186,16 @@
             <ac:spMk id="12" creationId="{16F2A830-7038-4FAF-A4C6-D9B77B8BC357}"/>
           </ac:spMkLst>
         </pc:spChg>
+        <pc:spChg chg="add mod">
+          <ac:chgData name="Bindel,Hayden M" userId="054703d1-2bd2-4668-8a02-d5bbf2e4de1e" providerId="ADAL" clId="{02989CDD-321A-44E8-8B77-599C685A5192}" dt="2026-04-27T23:03:48.501" v="514" actId="1076"/>
+          <ac:spMkLst>
+            <pc:docMk/>
+            <pc:sldMk cId="2328655230" sldId="256"/>
+            <ac:spMk id="17" creationId="{A45393C1-86BA-7ECB-30C0-08BD1880E877}"/>
+          </ac:spMkLst>
+        </pc:spChg>
         <pc:picChg chg="add mod">
-          <ac:chgData name="Bindel,Hayden M" userId="054703d1-2bd2-4668-8a02-d5bbf2e4de1e" providerId="ADAL" clId="{02989CDD-321A-44E8-8B77-599C685A5192}" dt="2026-04-24T16:29:19.993" v="107" actId="1076"/>
+          <ac:chgData name="Bindel,Hayden M" userId="054703d1-2bd2-4668-8a02-d5bbf2e4de1e" providerId="ADAL" clId="{02989CDD-321A-44E8-8B77-599C685A5192}" dt="2026-04-27T23:02:38.589" v="505" actId="1076"/>
           <ac:picMkLst>
             <pc:docMk/>
             <pc:sldMk cId="2328655230" sldId="256"/>
@@ -196,19 +212,11 @@
         </pc:picChg>
       </pc:sldChg>
       <pc:sldChg chg="addSp delSp modSp mod">
-        <pc:chgData name="Bindel,Hayden M" userId="054703d1-2bd2-4668-8a02-d5bbf2e4de1e" providerId="ADAL" clId="{02989CDD-321A-44E8-8B77-599C685A5192}" dt="2026-04-24T16:42:18.331" v="495" actId="14100"/>
+        <pc:chgData name="Bindel,Hayden M" userId="054703d1-2bd2-4668-8a02-d5bbf2e4de1e" providerId="ADAL" clId="{02989CDD-321A-44E8-8B77-599C685A5192}" dt="2026-04-27T23:06:34.251" v="522" actId="478"/>
         <pc:sldMkLst>
           <pc:docMk/>
           <pc:sldMk cId="32816923" sldId="257"/>
         </pc:sldMkLst>
-        <pc:spChg chg="add del mod">
-          <ac:chgData name="Bindel,Hayden M" userId="054703d1-2bd2-4668-8a02-d5bbf2e4de1e" providerId="ADAL" clId="{02989CDD-321A-44E8-8B77-599C685A5192}" dt="2026-04-24T16:32:49.155" v="342"/>
-          <ac:spMkLst>
-            <pc:docMk/>
-            <pc:sldMk cId="32816923" sldId="257"/>
-            <ac:spMk id="4" creationId="{CE6EA951-5965-63DA-9C58-240E43D471C3}"/>
-          </ac:spMkLst>
-        </pc:spChg>
         <pc:spChg chg="mod">
           <ac:chgData name="Bindel,Hayden M" userId="054703d1-2bd2-4668-8a02-d5bbf2e4de1e" providerId="ADAL" clId="{02989CDD-321A-44E8-8B77-599C685A5192}" dt="2026-04-24T16:37:01.185" v="405" actId="20577"/>
           <ac:spMkLst>
@@ -217,44 +225,28 @@
             <ac:spMk id="5" creationId="{92D4A164-57FB-A59E-CC2F-85953A9D3A9C}"/>
           </ac:spMkLst>
         </pc:spChg>
+        <pc:spChg chg="del">
+          <ac:chgData name="Bindel,Hayden M" userId="054703d1-2bd2-4668-8a02-d5bbf2e4de1e" providerId="ADAL" clId="{02989CDD-321A-44E8-8B77-599C685A5192}" dt="2026-04-27T23:06:34.251" v="522" actId="478"/>
+          <ac:spMkLst>
+            <pc:docMk/>
+            <pc:sldMk cId="32816923" sldId="257"/>
+            <ac:spMk id="21" creationId="{1F528188-47D6-C4A7-7B80-0AFD4387443B}"/>
+          </ac:spMkLst>
+        </pc:spChg>
         <pc:spChg chg="mod">
-          <ac:chgData name="Bindel,Hayden M" userId="054703d1-2bd2-4668-8a02-d5bbf2e4de1e" providerId="ADAL" clId="{02989CDD-321A-44E8-8B77-599C685A5192}" dt="2026-04-24T16:37:09.933" v="407" actId="14100"/>
+          <ac:chgData name="Bindel,Hayden M" userId="054703d1-2bd2-4668-8a02-d5bbf2e4de1e" providerId="ADAL" clId="{02989CDD-321A-44E8-8B77-599C685A5192}" dt="2026-04-27T23:06:27.793" v="521" actId="255"/>
           <ac:spMkLst>
             <pc:docMk/>
             <pc:sldMk cId="32816923" sldId="257"/>
             <ac:spMk id="31" creationId="{B7E6C868-42E5-E7FD-3D11-B9CF69158F57}"/>
           </ac:spMkLst>
         </pc:spChg>
-        <pc:picChg chg="add del mod">
-          <ac:chgData name="Bindel,Hayden M" userId="054703d1-2bd2-4668-8a02-d5bbf2e4de1e" providerId="ADAL" clId="{02989CDD-321A-44E8-8B77-599C685A5192}" dt="2026-04-24T16:32:04.680" v="333" actId="478"/>
-          <ac:picMkLst>
-            <pc:docMk/>
-            <pc:sldMk cId="32816923" sldId="257"/>
-            <ac:picMk id="3" creationId="{05F5B3E7-95F3-3CF7-2F15-F41EF3725AAB}"/>
-          </ac:picMkLst>
-        </pc:picChg>
-        <pc:picChg chg="add del mod">
-          <ac:chgData name="Bindel,Hayden M" userId="054703d1-2bd2-4668-8a02-d5bbf2e4de1e" providerId="ADAL" clId="{02989CDD-321A-44E8-8B77-599C685A5192}" dt="2026-04-24T16:34:30.420" v="392" actId="478"/>
-          <ac:picMkLst>
-            <pc:docMk/>
-            <pc:sldMk cId="32816923" sldId="257"/>
-            <ac:picMk id="7" creationId="{2F0D8FA3-47C2-4FF7-0123-65D4CB1D9672}"/>
-          </ac:picMkLst>
-        </pc:picChg>
         <pc:picChg chg="add mod">
           <ac:chgData name="Bindel,Hayden M" userId="054703d1-2bd2-4668-8a02-d5bbf2e4de1e" providerId="ADAL" clId="{02989CDD-321A-44E8-8B77-599C685A5192}" dt="2026-04-24T16:34:38.864" v="394" actId="1076"/>
           <ac:picMkLst>
             <pc:docMk/>
             <pc:sldMk cId="32816923" sldId="257"/>
             <ac:picMk id="8" creationId="{2BE5DC5E-6C72-C22E-5156-38E43177300B}"/>
-          </ac:picMkLst>
-        </pc:picChg>
-        <pc:picChg chg="add del mod">
-          <ac:chgData name="Bindel,Hayden M" userId="054703d1-2bd2-4668-8a02-d5bbf2e4de1e" providerId="ADAL" clId="{02989CDD-321A-44E8-8B77-599C685A5192}" dt="2026-04-24T16:38:01.721" v="411" actId="21"/>
-          <ac:picMkLst>
-            <pc:docMk/>
-            <pc:sldMk cId="32816923" sldId="257"/>
-            <ac:picMk id="10" creationId="{1973347E-74D7-A7F5-11A9-0E08FE5A3BC8}"/>
           </ac:picMkLst>
         </pc:picChg>
         <pc:picChg chg="add mod">
@@ -267,17 +259,25 @@
         </pc:picChg>
       </pc:sldChg>
       <pc:sldChg chg="addSp delSp modSp mod">
-        <pc:chgData name="Bindel,Hayden M" userId="054703d1-2bd2-4668-8a02-d5bbf2e4de1e" providerId="ADAL" clId="{02989CDD-321A-44E8-8B77-599C685A5192}" dt="2026-04-24T16:42:50.029" v="501" actId="14100"/>
+        <pc:chgData name="Bindel,Hayden M" userId="054703d1-2bd2-4668-8a02-d5bbf2e4de1e" providerId="ADAL" clId="{02989CDD-321A-44E8-8B77-599C685A5192}" dt="2026-04-27T23:08:55.528" v="532" actId="20577"/>
         <pc:sldMkLst>
           <pc:docMk/>
           <pc:sldMk cId="680907006" sldId="258"/>
         </pc:sldMkLst>
         <pc:spChg chg="add del mod">
-          <ac:chgData name="Bindel,Hayden M" userId="054703d1-2bd2-4668-8a02-d5bbf2e4de1e" providerId="ADAL" clId="{02989CDD-321A-44E8-8B77-599C685A5192}" dt="2026-04-23T16:14:24.332" v="39"/>
+          <ac:chgData name="Bindel,Hayden M" userId="054703d1-2bd2-4668-8a02-d5bbf2e4de1e" providerId="ADAL" clId="{02989CDD-321A-44E8-8B77-599C685A5192}" dt="2026-04-27T23:08:01.580" v="525" actId="478"/>
           <ac:spMkLst>
             <pc:docMk/>
             <pc:sldMk cId="680907006" sldId="258"/>
-            <ac:spMk id="2" creationId="{6F684EC5-EE17-9F19-1036-15E06642E1E6}"/>
+            <ac:spMk id="2" creationId="{138A4CD9-97C2-1FDF-1AE0-97F372ADFC7D}"/>
+          </ac:spMkLst>
+        </pc:spChg>
+        <pc:spChg chg="add mod">
+          <ac:chgData name="Bindel,Hayden M" userId="054703d1-2bd2-4668-8a02-d5bbf2e4de1e" providerId="ADAL" clId="{02989CDD-321A-44E8-8B77-599C685A5192}" dt="2026-04-27T23:08:55.528" v="532" actId="20577"/>
+          <ac:spMkLst>
+            <pc:docMk/>
+            <pc:sldMk cId="680907006" sldId="258"/>
+            <ac:spMk id="3" creationId="{B90CC9E8-6EA7-F758-1D45-742F3301332D}"/>
           </ac:spMkLst>
         </pc:spChg>
         <pc:spChg chg="mod">
@@ -288,14 +288,6 @@
             <ac:spMk id="5" creationId="{92F2DC8D-0388-B17E-E9BD-555608716433}"/>
           </ac:spMkLst>
         </pc:spChg>
-        <pc:picChg chg="add del mod">
-          <ac:chgData name="Bindel,Hayden M" userId="054703d1-2bd2-4668-8a02-d5bbf2e4de1e" providerId="ADAL" clId="{02989CDD-321A-44E8-8B77-599C685A5192}" dt="2026-04-24T16:37:47.150" v="409" actId="478"/>
-          <ac:picMkLst>
-            <pc:docMk/>
-            <pc:sldMk cId="680907006" sldId="258"/>
-            <ac:picMk id="3" creationId="{739190D7-9706-0815-C611-D2963F41A036}"/>
-          </ac:picMkLst>
-        </pc:picChg>
         <pc:picChg chg="add mod">
           <ac:chgData name="Bindel,Hayden M" userId="054703d1-2bd2-4668-8a02-d5bbf2e4de1e" providerId="ADAL" clId="{02989CDD-321A-44E8-8B77-599C685A5192}" dt="2026-04-24T16:38:16.978" v="416" actId="14100"/>
           <ac:picMkLst>
@@ -335,38 +327,6 @@
             <ac:spMk id="5" creationId="{373EABA1-6BCB-5FBE-F6C9-AA5EE6793EE7}"/>
           </ac:spMkLst>
         </pc:spChg>
-        <pc:picChg chg="add del mod">
-          <ac:chgData name="Bindel,Hayden M" userId="054703d1-2bd2-4668-8a02-d5bbf2e4de1e" providerId="ADAL" clId="{02989CDD-321A-44E8-8B77-599C685A5192}" dt="2026-04-24T16:39:12.010" v="469" actId="478"/>
-          <ac:picMkLst>
-            <pc:docMk/>
-            <pc:sldMk cId="529098348" sldId="259"/>
-            <ac:picMk id="3" creationId="{6099998B-0BEF-C145-728D-C962BDD5D819}"/>
-          </ac:picMkLst>
-        </pc:picChg>
-        <pc:picChg chg="add del mod">
-          <ac:chgData name="Bindel,Hayden M" userId="054703d1-2bd2-4668-8a02-d5bbf2e4de1e" providerId="ADAL" clId="{02989CDD-321A-44E8-8B77-599C685A5192}" dt="2026-04-24T16:39:12.010" v="469" actId="478"/>
-          <ac:picMkLst>
-            <pc:docMk/>
-            <pc:sldMk cId="529098348" sldId="259"/>
-            <ac:picMk id="6" creationId="{134987C4-E130-6896-9607-BD393E423FFD}"/>
-          </ac:picMkLst>
-        </pc:picChg>
-        <pc:picChg chg="add del mod">
-          <ac:chgData name="Bindel,Hayden M" userId="054703d1-2bd2-4668-8a02-d5bbf2e4de1e" providerId="ADAL" clId="{02989CDD-321A-44E8-8B77-599C685A5192}" dt="2026-04-24T16:39:12.010" v="469" actId="478"/>
-          <ac:picMkLst>
-            <pc:docMk/>
-            <pc:sldMk cId="529098348" sldId="259"/>
-            <ac:picMk id="8" creationId="{133A6C2C-92E7-AA37-3EDB-AFB42A737F86}"/>
-          </ac:picMkLst>
-        </pc:picChg>
-        <pc:picChg chg="add del mod">
-          <ac:chgData name="Bindel,Hayden M" userId="054703d1-2bd2-4668-8a02-d5bbf2e4de1e" providerId="ADAL" clId="{02989CDD-321A-44E8-8B77-599C685A5192}" dt="2026-04-24T16:39:12.010" v="469" actId="478"/>
-          <ac:picMkLst>
-            <pc:docMk/>
-            <pc:sldMk cId="529098348" sldId="259"/>
-            <ac:picMk id="10" creationId="{81F28607-728E-D280-637D-A7E1A938325B}"/>
-          </ac:picMkLst>
-        </pc:picChg>
         <pc:picChg chg="add mod">
           <ac:chgData name="Bindel,Hayden M" userId="054703d1-2bd2-4668-8a02-d5bbf2e4de1e" providerId="ADAL" clId="{02989CDD-321A-44E8-8B77-599C685A5192}" dt="2026-04-24T16:40:13.883" v="484" actId="14100"/>
           <ac:picMkLst>
@@ -1602,7 +1562,7 @@
           <a:p>
             <a:fld id="{E695B7AD-C0E4-4106-98F1-A426950388A1}" type="datetimeFigureOut">
               <a:rPr lang="en-US" smtClean="0"/>
-              <a:t>4/24/2026</a:t>
+              <a:t>4/27/2026</a:t>
             </a:fld>
             <a:endParaRPr lang="en-US"/>
           </a:p>
@@ -2067,31 +2027,6 @@
       </p:sp>
       <p:sp>
         <p:nvSpPr>
-          <p:cNvPr id="3" name="Text Placeholder 2">
-            <a:extLst>
-              <a:ext uri="{FF2B5EF4-FFF2-40B4-BE49-F238E27FC236}">
-                <a16:creationId xmlns:a16="http://schemas.microsoft.com/office/drawing/2014/main" id="{DF611C5B-6CA3-41B7-A609-6C0419D56703}"/>
-              </a:ext>
-            </a:extLst>
-          </p:cNvPr>
-          <p:cNvSpPr>
-            <a:spLocks noGrp="1"/>
-          </p:cNvSpPr>
-          <p:nvPr>
-            <p:ph type="body" sz="quarter" idx="12"/>
-          </p:nvPr>
-        </p:nvSpPr>
-        <p:spPr/>
-        <p:txBody>
-          <a:bodyPr/>
-          <a:lstStyle/>
-          <a:p>
-            <a:endParaRPr lang="en-US" dirty="0"/>
-          </a:p>
-        </p:txBody>
-      </p:sp>
-      <p:sp>
-        <p:nvSpPr>
           <p:cNvPr id="4" name="Text Placeholder 3">
             <a:extLst>
               <a:ext uri="{FF2B5EF4-FFF2-40B4-BE49-F238E27FC236}">
@@ -2535,7 +2470,7 @@
         </p:blipFill>
         <p:spPr>
           <a:xfrm>
-            <a:off x="14589761" y="13776957"/>
+            <a:off x="13233400" y="14119855"/>
             <a:ext cx="17424400" cy="10454645"/>
           </a:xfrm>
           <a:prstGeom prst="rect">
@@ -2579,6 +2514,517 @@
           </a:prstGeom>
         </p:spPr>
       </p:pic>
+      <p:sp>
+        <p:nvSpPr>
+          <p:cNvPr id="17" name="Rectangle 1">
+            <a:extLst>
+              <a:ext uri="{FF2B5EF4-FFF2-40B4-BE49-F238E27FC236}">
+                <a16:creationId xmlns:a16="http://schemas.microsoft.com/office/drawing/2014/main" id="{A45393C1-86BA-7ECB-30C0-08BD1880E877}"/>
+              </a:ext>
+            </a:extLst>
+          </p:cNvPr>
+          <p:cNvSpPr>
+            <a:spLocks noGrp="1" noChangeArrowheads="1"/>
+          </p:cNvSpPr>
+          <p:nvPr>
+            <p:ph type="body" sz="quarter" idx="12"/>
+          </p:nvPr>
+        </p:nvSpPr>
+        <p:spPr bwMode="auto">
+          <a:xfrm>
+            <a:off x="30069971" y="8311244"/>
+            <a:ext cx="13211629" cy="12403395"/>
+          </a:xfrm>
+          <a:prstGeom prst="rect">
+            <a:avLst/>
+          </a:prstGeom>
+          <a:noFill/>
+          <a:ln>
+            <a:noFill/>
+          </a:ln>
+          <a:effectLst/>
+          <a:extLst>
+            <a:ext uri="{909E8E84-426E-40DD-AFC4-6F175D3DCCD1}">
+              <a14:hiddenFill xmlns:a14="http://schemas.microsoft.com/office/drawing/2010/main">
+                <a:solidFill>
+                  <a:schemeClr val="accent1"/>
+                </a:solidFill>
+              </a14:hiddenFill>
+            </a:ext>
+            <a:ext uri="{91240B29-F687-4F45-9708-019B960494DF}">
+              <a14:hiddenLine xmlns:a14="http://schemas.microsoft.com/office/drawing/2010/main" w="9525">
+                <a:solidFill>
+                  <a:schemeClr val="tx1"/>
+                </a:solidFill>
+                <a:miter lim="800000"/>
+                <a:headEnd/>
+                <a:tailEnd/>
+              </a14:hiddenLine>
+            </a:ext>
+            <a:ext uri="{AF507438-7753-43E0-B8FC-AC1667EBCBE1}">
+              <a14:hiddenEffects xmlns:a14="http://schemas.microsoft.com/office/drawing/2010/main">
+                <a:effectLst>
+                  <a:outerShdw dist="35921" dir="2700000" algn="ctr" rotWithShape="0">
+                    <a:schemeClr val="bg2"/>
+                  </a:outerShdw>
+                </a:effectLst>
+              </a14:hiddenEffects>
+            </a:ext>
+          </a:extLst>
+        </p:spPr>
+        <p:txBody>
+          <a:bodyPr vert="horz" wrap="square" lIns="91440" tIns="45720" rIns="91440" bIns="45720" numCol="1" anchor="ctr" anchorCtr="0" compatLnSpc="1">
+            <a:prstTxWarp prst="textNoShape">
+              <a:avLst/>
+            </a:prstTxWarp>
+            <a:spAutoFit/>
+          </a:bodyPr>
+          <a:lstStyle/>
+          <a:p>
+            <a:pPr marL="0" marR="0" lvl="0" indent="0" defTabSz="914400" rtl="0" eaLnBrk="0" fontAlgn="base" latinLnBrk="0" hangingPunct="0">
+              <a:lnSpc>
+                <a:spcPct val="100000"/>
+              </a:lnSpc>
+              <a:spcBef>
+                <a:spcPct val="0"/>
+              </a:spcBef>
+              <a:spcAft>
+                <a:spcPct val="0"/>
+              </a:spcAft>
+              <a:buClrTx/>
+              <a:buSzTx/>
+              <a:buFontTx/>
+              <a:buChar char="•"/>
+              <a:tabLst/>
+            </a:pPr>
+            <a:r>
+              <a:rPr kumimoji="0" lang="en-US" altLang="en-US" sz="4000" b="1" i="0" u="none" strike="noStrike" cap="none" normalizeH="0" baseline="0" dirty="0">
+                <a:ln>
+                  <a:noFill/>
+                </a:ln>
+                <a:solidFill>
+                  <a:schemeClr val="tx1"/>
+                </a:solidFill>
+                <a:effectLst/>
+                <a:latin typeface="Arial" panose="020B0604020202020204" pitchFamily="34" charset="0"/>
+              </a:rPr>
+              <a:t>Market Efficiency (Quantile Analysis):</a:t>
+            </a:r>
+            <a:r>
+              <a:rPr kumimoji="0" lang="en-US" altLang="en-US" sz="4000" b="0" i="0" u="none" strike="noStrike" cap="none" normalizeH="0" baseline="0" dirty="0">
+                <a:ln>
+                  <a:noFill/>
+                </a:ln>
+                <a:solidFill>
+                  <a:schemeClr val="tx1"/>
+                </a:solidFill>
+                <a:effectLst/>
+                <a:latin typeface="Arial" panose="020B0604020202020204" pitchFamily="34" charset="0"/>
+              </a:rPr>
+              <a:t> * </a:t>
+            </a:r>
+            <a:r>
+              <a:rPr kumimoji="0" lang="en-US" altLang="en-US" sz="4000" b="1" i="0" u="none" strike="noStrike" cap="none" normalizeH="0" baseline="0" dirty="0">
+                <a:ln>
+                  <a:noFill/>
+                </a:ln>
+                <a:solidFill>
+                  <a:schemeClr val="tx1"/>
+                </a:solidFill>
+                <a:effectLst/>
+                <a:latin typeface="Arial" panose="020B0604020202020204" pitchFamily="34" charset="0"/>
+              </a:rPr>
+              <a:t>F2P Markets:</a:t>
+            </a:r>
+            <a:r>
+              <a:rPr kumimoji="0" lang="en-US" altLang="en-US" sz="4000" b="0" i="0" u="none" strike="noStrike" cap="none" normalizeH="0" baseline="0" dirty="0">
+                <a:ln>
+                  <a:noFill/>
+                </a:ln>
+                <a:solidFill>
+                  <a:schemeClr val="tx1"/>
+                </a:solidFill>
+                <a:effectLst/>
+                <a:latin typeface="Arial" panose="020B0604020202020204" pitchFamily="34" charset="0"/>
+              </a:rPr>
+              <a:t> Exhibit "perfect competition" with margins heavily concentrated in the </a:t>
+            </a:r>
+            <a:r>
+              <a:rPr kumimoji="0" lang="en-US" altLang="en-US" sz="4000" b="1" i="0" u="none" strike="noStrike" cap="none" normalizeH="0" baseline="0" dirty="0">
+                <a:ln>
+                  <a:noFill/>
+                </a:ln>
+                <a:solidFill>
+                  <a:schemeClr val="tx1"/>
+                </a:solidFill>
+                <a:effectLst/>
+                <a:latin typeface="Arial" panose="020B0604020202020204" pitchFamily="34" charset="0"/>
+              </a:rPr>
+              <a:t>0–2%</a:t>
+            </a:r>
+            <a:r>
+              <a:rPr kumimoji="0" lang="en-US" altLang="en-US" sz="4000" b="0" i="0" u="none" strike="noStrike" cap="none" normalizeH="0" baseline="0" dirty="0">
+                <a:ln>
+                  <a:noFill/>
+                </a:ln>
+                <a:solidFill>
+                  <a:schemeClr val="tx1"/>
+                </a:solidFill>
+                <a:effectLst/>
+                <a:latin typeface="Arial" panose="020B0604020202020204" pitchFamily="34" charset="0"/>
+              </a:rPr>
+              <a:t> range, offering limited profit potential.</a:t>
+            </a:r>
+          </a:p>
+          <a:p>
+            <a:pPr marL="0" marR="0" lvl="0" indent="0" defTabSz="914400" rtl="0" eaLnBrk="0" fontAlgn="base" latinLnBrk="0" hangingPunct="0">
+              <a:lnSpc>
+                <a:spcPct val="100000"/>
+              </a:lnSpc>
+              <a:spcBef>
+                <a:spcPct val="0"/>
+              </a:spcBef>
+              <a:spcAft>
+                <a:spcPct val="0"/>
+              </a:spcAft>
+              <a:buClrTx/>
+              <a:buSzTx/>
+              <a:buFontTx/>
+              <a:buChar char="•"/>
+              <a:tabLst/>
+            </a:pPr>
+            <a:r>
+              <a:rPr kumimoji="0" lang="en-US" altLang="en-US" sz="4000" b="1" i="0" u="none" strike="noStrike" cap="none" normalizeH="0" baseline="0" dirty="0">
+                <a:ln>
+                  <a:noFill/>
+                </a:ln>
+                <a:solidFill>
+                  <a:schemeClr val="tx1"/>
+                </a:solidFill>
+                <a:effectLst/>
+                <a:latin typeface="Arial" panose="020B0604020202020204" pitchFamily="34" charset="0"/>
+              </a:rPr>
+              <a:t>Members Markets:</a:t>
+            </a:r>
+            <a:r>
+              <a:rPr kumimoji="0" lang="en-US" altLang="en-US" sz="4000" b="0" i="0" u="none" strike="noStrike" cap="none" normalizeH="0" baseline="0" dirty="0">
+                <a:ln>
+                  <a:noFill/>
+                </a:ln>
+                <a:solidFill>
+                  <a:schemeClr val="tx1"/>
+                </a:solidFill>
+                <a:effectLst/>
+                <a:latin typeface="Arial" panose="020B0604020202020204" pitchFamily="34" charset="0"/>
+              </a:rPr>
+              <a:t> Demonstrate higher volatility with margin outliers reaching </a:t>
+            </a:r>
+            <a:r>
+              <a:rPr kumimoji="0" lang="en-US" altLang="en-US" sz="4000" b="1" i="0" u="none" strike="noStrike" cap="none" normalizeH="0" baseline="0" dirty="0">
+                <a:ln>
+                  <a:noFill/>
+                </a:ln>
+                <a:solidFill>
+                  <a:schemeClr val="tx1"/>
+                </a:solidFill>
+                <a:effectLst/>
+                <a:latin typeface="Arial" panose="020B0604020202020204" pitchFamily="34" charset="0"/>
+              </a:rPr>
+              <a:t>10–25%</a:t>
+            </a:r>
+            <a:r>
+              <a:rPr kumimoji="0" lang="en-US" altLang="en-US" sz="4000" b="0" i="0" u="none" strike="noStrike" cap="none" normalizeH="0" baseline="0" dirty="0">
+                <a:ln>
+                  <a:noFill/>
+                </a:ln>
+                <a:solidFill>
+                  <a:schemeClr val="tx1"/>
+                </a:solidFill>
+                <a:effectLst/>
+                <a:latin typeface="Arial" panose="020B0604020202020204" pitchFamily="34" charset="0"/>
+              </a:rPr>
+              <a:t>, identifying the optimal sector for web-mining and flipping strategies.</a:t>
+            </a:r>
+          </a:p>
+          <a:p>
+            <a:pPr marL="0" marR="0" lvl="0" indent="0" defTabSz="914400" rtl="0" eaLnBrk="0" fontAlgn="base" latinLnBrk="0" hangingPunct="0">
+              <a:lnSpc>
+                <a:spcPct val="100000"/>
+              </a:lnSpc>
+              <a:spcBef>
+                <a:spcPct val="0"/>
+              </a:spcBef>
+              <a:spcAft>
+                <a:spcPct val="0"/>
+              </a:spcAft>
+              <a:buClrTx/>
+              <a:buSzTx/>
+              <a:buFontTx/>
+              <a:buChar char="•"/>
+              <a:tabLst/>
+            </a:pPr>
+            <a:r>
+              <a:rPr kumimoji="0" lang="en-US" altLang="en-US" sz="4000" b="1" i="0" u="none" strike="noStrike" cap="none" normalizeH="0" baseline="0" dirty="0">
+                <a:ln>
+                  <a:noFill/>
+                </a:ln>
+                <a:solidFill>
+                  <a:schemeClr val="tx1"/>
+                </a:solidFill>
+                <a:effectLst/>
+                <a:latin typeface="Arial" panose="020B0604020202020204" pitchFamily="34" charset="0"/>
+              </a:rPr>
+              <a:t>Liquidity &amp; Price Action (Candlestick Analysis):</a:t>
+            </a:r>
+            <a:endParaRPr kumimoji="0" lang="en-US" altLang="en-US" sz="4000" b="0" i="0" u="none" strike="noStrike" cap="none" normalizeH="0" baseline="0" dirty="0">
+              <a:ln>
+                <a:noFill/>
+              </a:ln>
+              <a:solidFill>
+                <a:schemeClr val="tx1"/>
+              </a:solidFill>
+              <a:effectLst/>
+              <a:latin typeface="Arial" panose="020B0604020202020204" pitchFamily="34" charset="0"/>
+            </a:endParaRPr>
+          </a:p>
+          <a:p>
+            <a:pPr marL="0" marR="0" lvl="0" indent="0" defTabSz="914400" rtl="0" eaLnBrk="0" fontAlgn="base" latinLnBrk="0" hangingPunct="0">
+              <a:lnSpc>
+                <a:spcPct val="100000"/>
+              </a:lnSpc>
+              <a:spcBef>
+                <a:spcPct val="0"/>
+              </a:spcBef>
+              <a:spcAft>
+                <a:spcPct val="0"/>
+              </a:spcAft>
+              <a:buClrTx/>
+              <a:buSzTx/>
+              <a:buFontTx/>
+              <a:buChar char="•"/>
+              <a:tabLst/>
+            </a:pPr>
+            <a:r>
+              <a:rPr kumimoji="0" lang="en-US" altLang="en-US" sz="4000" b="1" i="0" u="none" strike="noStrike" cap="none" normalizeH="0" baseline="0" dirty="0">
+                <a:ln>
+                  <a:noFill/>
+                </a:ln>
+                <a:solidFill>
+                  <a:schemeClr val="tx1"/>
+                </a:solidFill>
+                <a:effectLst/>
+                <a:latin typeface="Arial" panose="020B0604020202020204" pitchFamily="34" charset="0"/>
+              </a:rPr>
+              <a:t>High-Volume Stability:</a:t>
+            </a:r>
+            <a:r>
+              <a:rPr kumimoji="0" lang="en-US" altLang="en-US" sz="4000" b="0" i="0" u="none" strike="noStrike" cap="none" normalizeH="0" baseline="0" dirty="0">
+                <a:ln>
+                  <a:noFill/>
+                </a:ln>
+                <a:solidFill>
+                  <a:schemeClr val="tx1"/>
+                </a:solidFill>
+                <a:effectLst/>
+                <a:latin typeface="Arial" panose="020B0604020202020204" pitchFamily="34" charset="0"/>
+              </a:rPr>
+              <a:t> Assets like the </a:t>
+            </a:r>
+            <a:r>
+              <a:rPr kumimoji="0" lang="en-US" altLang="en-US" sz="4000" b="0" i="1" u="none" strike="noStrike" cap="none" normalizeH="0" baseline="0" dirty="0">
+                <a:ln>
+                  <a:noFill/>
+                </a:ln>
+                <a:solidFill>
+                  <a:schemeClr val="tx1"/>
+                </a:solidFill>
+                <a:effectLst/>
+                <a:latin typeface="Arial" panose="020B0604020202020204" pitchFamily="34" charset="0"/>
+              </a:rPr>
+              <a:t>Old School Bond</a:t>
+            </a:r>
+            <a:r>
+              <a:rPr kumimoji="0" lang="en-US" altLang="en-US" sz="4000" b="0" i="0" u="none" strike="noStrike" cap="none" normalizeH="0" baseline="0" dirty="0">
+                <a:ln>
+                  <a:noFill/>
+                </a:ln>
+                <a:solidFill>
+                  <a:schemeClr val="tx1"/>
+                </a:solidFill>
+                <a:effectLst/>
+                <a:latin typeface="Arial" panose="020B0604020202020204" pitchFamily="34" charset="0"/>
+              </a:rPr>
+              <a:t> show smooth price action, allowing for high-liquidity entry and exit with lower risk.</a:t>
+            </a:r>
+          </a:p>
+          <a:p>
+            <a:pPr marL="0" marR="0" lvl="0" indent="0" defTabSz="914400" rtl="0" eaLnBrk="0" fontAlgn="base" latinLnBrk="0" hangingPunct="0">
+              <a:lnSpc>
+                <a:spcPct val="100000"/>
+              </a:lnSpc>
+              <a:spcBef>
+                <a:spcPct val="0"/>
+              </a:spcBef>
+              <a:spcAft>
+                <a:spcPct val="0"/>
+              </a:spcAft>
+              <a:buClrTx/>
+              <a:buSzTx/>
+              <a:buFontTx/>
+              <a:buChar char="•"/>
+              <a:tabLst/>
+            </a:pPr>
+            <a:r>
+              <a:rPr kumimoji="0" lang="en-US" altLang="en-US" sz="4000" b="1" i="0" u="none" strike="noStrike" cap="none" normalizeH="0" baseline="0" dirty="0">
+                <a:ln>
+                  <a:noFill/>
+                </a:ln>
+                <a:solidFill>
+                  <a:schemeClr val="tx1"/>
+                </a:solidFill>
+                <a:effectLst/>
+                <a:latin typeface="Arial" panose="020B0604020202020204" pitchFamily="34" charset="0"/>
+              </a:rPr>
+              <a:t>Low-Volume Risk:</a:t>
+            </a:r>
+            <a:r>
+              <a:rPr kumimoji="0" lang="en-US" altLang="en-US" sz="4000" b="0" i="0" u="none" strike="noStrike" cap="none" normalizeH="0" baseline="0" dirty="0">
+                <a:ln>
+                  <a:noFill/>
+                </a:ln>
+                <a:solidFill>
+                  <a:schemeClr val="tx1"/>
+                </a:solidFill>
+                <a:effectLst/>
+                <a:latin typeface="Arial" panose="020B0604020202020204" pitchFamily="34" charset="0"/>
+              </a:rPr>
+              <a:t> Niche items (e.g., </a:t>
+            </a:r>
+            <a:r>
+              <a:rPr kumimoji="0" lang="en-US" altLang="en-US" sz="4000" b="0" i="1" u="none" strike="noStrike" cap="none" normalizeH="0" baseline="0" dirty="0">
+                <a:ln>
+                  <a:noFill/>
+                </a:ln>
+                <a:solidFill>
+                  <a:schemeClr val="tx1"/>
+                </a:solidFill>
+                <a:effectLst/>
+                <a:latin typeface="Arial" panose="020B0604020202020204" pitchFamily="34" charset="0"/>
+              </a:rPr>
+              <a:t>3rd Age Amulet</a:t>
+            </a:r>
+            <a:r>
+              <a:rPr kumimoji="0" lang="en-US" altLang="en-US" sz="4000" b="0" i="0" u="none" strike="noStrike" cap="none" normalizeH="0" baseline="0" dirty="0">
+                <a:ln>
+                  <a:noFill/>
+                </a:ln>
+                <a:solidFill>
+                  <a:schemeClr val="tx1"/>
+                </a:solidFill>
+                <a:effectLst/>
+                <a:latin typeface="Arial" panose="020B0604020202020204" pitchFamily="34" charset="0"/>
+              </a:rPr>
+              <a:t>) exhibit price "gaps" and significant wicks, indicating high-risk/high-reward territory where single trades shift market value.</a:t>
+            </a:r>
+          </a:p>
+          <a:p>
+            <a:pPr marL="0" marR="0" lvl="0" indent="0" defTabSz="914400" rtl="0" eaLnBrk="0" fontAlgn="base" latinLnBrk="0" hangingPunct="0">
+              <a:lnSpc>
+                <a:spcPct val="100000"/>
+              </a:lnSpc>
+              <a:spcBef>
+                <a:spcPct val="0"/>
+              </a:spcBef>
+              <a:spcAft>
+                <a:spcPct val="0"/>
+              </a:spcAft>
+              <a:buClrTx/>
+              <a:buSzTx/>
+              <a:buFontTx/>
+              <a:buChar char="•"/>
+              <a:tabLst/>
+            </a:pPr>
+            <a:r>
+              <a:rPr kumimoji="0" lang="en-US" altLang="en-US" sz="4000" b="1" i="0" u="none" strike="noStrike" cap="none" normalizeH="0" baseline="0" dirty="0">
+                <a:ln>
+                  <a:noFill/>
+                </a:ln>
+                <a:solidFill>
+                  <a:schemeClr val="tx1"/>
+                </a:solidFill>
+                <a:effectLst/>
+                <a:latin typeface="Arial" panose="020B0604020202020204" pitchFamily="34" charset="0"/>
+              </a:rPr>
+              <a:t>Final Summary:</a:t>
+            </a:r>
+            <a:r>
+              <a:rPr kumimoji="0" lang="en-US" altLang="en-US" sz="4000" b="0" i="0" u="none" strike="noStrike" cap="none" normalizeH="0" baseline="0" dirty="0">
+                <a:ln>
+                  <a:noFill/>
+                </a:ln>
+                <a:solidFill>
+                  <a:schemeClr val="tx1"/>
+                </a:solidFill>
+                <a:effectLst/>
+                <a:latin typeface="Arial" panose="020B0604020202020204" pitchFamily="34" charset="0"/>
+              </a:rPr>
+              <a:t> The Grand Exchange is macro-efficient but micro-volatile. By combining </a:t>
+            </a:r>
+            <a:r>
+              <a:rPr kumimoji="0" lang="en-US" altLang="en-US" sz="4000" b="1" i="0" u="none" strike="noStrike" cap="none" normalizeH="0" baseline="0" dirty="0">
+                <a:ln>
+                  <a:noFill/>
+                </a:ln>
+                <a:solidFill>
+                  <a:schemeClr val="tx1"/>
+                </a:solidFill>
+                <a:effectLst/>
+                <a:latin typeface="Arial" panose="020B0604020202020204" pitchFamily="34" charset="0"/>
+              </a:rPr>
+              <a:t>Quantile grouping</a:t>
+            </a:r>
+            <a:r>
+              <a:rPr kumimoji="0" lang="en-US" altLang="en-US" sz="4000" b="0" i="0" u="none" strike="noStrike" cap="none" normalizeH="0" baseline="0" dirty="0">
+                <a:ln>
+                  <a:noFill/>
+                </a:ln>
+                <a:solidFill>
+                  <a:schemeClr val="tx1"/>
+                </a:solidFill>
+                <a:effectLst/>
+                <a:latin typeface="Arial" panose="020B0604020202020204" pitchFamily="34" charset="0"/>
+              </a:rPr>
+              <a:t> to select the asset class and </a:t>
+            </a:r>
+            <a:r>
+              <a:rPr kumimoji="0" lang="en-US" altLang="en-US" sz="4000" b="1" i="0" u="none" strike="noStrike" cap="none" normalizeH="0" baseline="0" dirty="0">
+                <a:ln>
+                  <a:noFill/>
+                </a:ln>
+                <a:solidFill>
+                  <a:schemeClr val="tx1"/>
+                </a:solidFill>
+                <a:effectLst/>
+                <a:latin typeface="Arial" panose="020B0604020202020204" pitchFamily="34" charset="0"/>
+              </a:rPr>
+              <a:t>Candlestick analysis</a:t>
+            </a:r>
+            <a:r>
+              <a:rPr kumimoji="0" lang="en-US" altLang="en-US" sz="4000" b="0" i="0" u="none" strike="noStrike" cap="none" normalizeH="0" baseline="0" dirty="0">
+                <a:ln>
+                  <a:noFill/>
+                </a:ln>
+                <a:solidFill>
+                  <a:schemeClr val="tx1"/>
+                </a:solidFill>
+                <a:effectLst/>
+                <a:latin typeface="Arial" panose="020B0604020202020204" pitchFamily="34" charset="0"/>
+              </a:rPr>
+              <a:t> to time the trade, a data-driven participant can consistently outperform the average market baseline.</a:t>
+            </a:r>
+          </a:p>
+        </p:txBody>
+      </p:sp>
     </p:spTree>
     <p:extLst>
       <p:ext uri="{BB962C8B-B14F-4D97-AF65-F5344CB8AC3E}">
@@ -2639,41 +3085,6 @@
       </p:sp>
       <p:sp>
         <p:nvSpPr>
-          <p:cNvPr id="21" name="TextBox 20">
-            <a:extLst>
-              <a:ext uri="{FF2B5EF4-FFF2-40B4-BE49-F238E27FC236}">
-                <a16:creationId xmlns:a16="http://schemas.microsoft.com/office/drawing/2014/main" id="{1F528188-47D6-C4A7-7B80-0AFD4387443B}"/>
-              </a:ext>
-            </a:extLst>
-          </p:cNvPr>
-          <p:cNvSpPr txBox="1"/>
-          <p:nvPr/>
-        </p:nvSpPr>
-        <p:spPr>
-          <a:xfrm>
-            <a:off x="2525486" y="8708570"/>
-            <a:ext cx="37316228" cy="369332"/>
-          </a:xfrm>
-          <a:prstGeom prst="rect">
-            <a:avLst/>
-          </a:prstGeom>
-          <a:noFill/>
-        </p:spPr>
-        <p:txBody>
-          <a:bodyPr wrap="square" rtlCol="0">
-            <a:spAutoFit/>
-          </a:bodyPr>
-          <a:lstStyle/>
-          <a:p>
-            <a:r>
-              <a:rPr lang="en-US" dirty="0"/>
-              <a:t>t</a:t>
-            </a:r>
-          </a:p>
-        </p:txBody>
-      </p:sp>
-      <p:sp>
-        <p:nvSpPr>
           <p:cNvPr id="31" name="Rectangle 2">
             <a:extLst>
               <a:ext uri="{FF2B5EF4-FFF2-40B4-BE49-F238E27FC236}">
@@ -2688,8 +3099,8 @@
         </p:nvSpPr>
         <p:spPr bwMode="auto">
           <a:xfrm>
-            <a:off x="522514" y="5687786"/>
-            <a:ext cx="21423086" cy="26945838"/>
+            <a:off x="522514" y="9996658"/>
+            <a:ext cx="21423086" cy="18328094"/>
           </a:xfrm>
           <a:prstGeom prst="rect">
             <a:avLst/>
@@ -2736,6 +3147,104 @@
             <a:spAutoFit/>
           </a:bodyPr>
           <a:lstStyle/>
+          <a:p>
+            <a:r>
+              <a:rPr lang="en-US" sz="6600" b="1" dirty="0"/>
+              <a:t>1. Primary Source &amp; Methodology</a:t>
+            </a:r>
+            <a:endParaRPr lang="en-US" sz="6600" dirty="0"/>
+          </a:p>
+          <a:p>
+            <a:r>
+              <a:rPr lang="en-US" sz="6600" b="1" dirty="0"/>
+              <a:t>OSRS Wiki API Integration:</a:t>
+            </a:r>
+            <a:r>
+              <a:rPr lang="en-US" sz="6600" dirty="0"/>
+              <a:t> Leveraged high-frequency Real-Time Prices and Metadata Mapping APIs.</a:t>
+            </a:r>
+          </a:p>
+          <a:p>
+            <a:r>
+              <a:rPr lang="en-US" sz="6600" b="1" dirty="0"/>
+              <a:t>Responsible Mining:</a:t>
+            </a:r>
+            <a:r>
+              <a:rPr lang="en-US" sz="6600" dirty="0"/>
+              <a:t> Implemented a custom User-Agent string (Contact: Discord/Email) to adhere to the Wiki’s Fair Use policy, preventing IP blocks and ensuring transparent data scraping.</a:t>
+            </a:r>
+          </a:p>
+          <a:p>
+            <a:r>
+              <a:rPr lang="en-US" sz="6600" b="1" dirty="0"/>
+              <a:t>Tooling:</a:t>
+            </a:r>
+            <a:r>
+              <a:rPr lang="en-US" sz="6600" dirty="0"/>
+              <a:t> Utilized the Python requests library to ingest JSON payloads of "insta-buy" and "insta-sell" price points.</a:t>
+            </a:r>
+          </a:p>
+          <a:p>
+            <a:r>
+              <a:rPr lang="en-US" sz="6600" b="1" dirty="0"/>
+              <a:t>2. Serialization &amp; Caching (The .</a:t>
+            </a:r>
+            <a:r>
+              <a:rPr lang="en-US" sz="6600" b="1" dirty="0" err="1"/>
+              <a:t>pkl</a:t>
+            </a:r>
+            <a:r>
+              <a:rPr lang="en-US" sz="6600" b="1" dirty="0"/>
+              <a:t> Workflow)</a:t>
+            </a:r>
+            <a:endParaRPr lang="en-US" sz="6600" dirty="0"/>
+          </a:p>
+          <a:p>
+            <a:r>
+              <a:rPr lang="en-US" sz="6600" b="1" dirty="0"/>
+              <a:t>Storage Protocol:</a:t>
+            </a:r>
+            <a:r>
+              <a:rPr lang="en-US" sz="6600" dirty="0"/>
+              <a:t> Employed the pickle library for high-speed data serialization (</a:t>
+            </a:r>
+            <a:r>
+              <a:rPr lang="en-US" sz="6600" dirty="0" err="1"/>
+              <a:t>ge_data_cache.pkl</a:t>
+            </a:r>
+            <a:r>
+              <a:rPr lang="en-US" sz="6600" dirty="0"/>
+              <a:t>).</a:t>
+            </a:r>
+          </a:p>
+          <a:p>
+            <a:r>
+              <a:rPr lang="en-US" sz="6600" b="1" dirty="0"/>
+              <a:t>Technical Rationale:</a:t>
+            </a:r>
+            <a:r>
+              <a:rPr lang="en-US" sz="6600" dirty="0"/>
+              <a:t> Unlike CSVs, Pickle preserves native Python object structures and </a:t>
+            </a:r>
+            <a:r>
+              <a:rPr lang="en-US" sz="6600" dirty="0" err="1"/>
+              <a:t>timezone</a:t>
+            </a:r>
+            <a:r>
+              <a:rPr lang="en-US" sz="6600" dirty="0"/>
+              <a:t>-aware UTC timestamps, which are vital for accurate 5-minute interval time-series analysis.</a:t>
+            </a:r>
+          </a:p>
+          <a:p>
+            <a:r>
+              <a:rPr lang="en-US" sz="6600" b="1" dirty="0"/>
+              <a:t>Efficiency:</a:t>
+            </a:r>
+            <a:r>
+              <a:rPr lang="en-US" sz="6600" dirty="0"/>
+              <a:t> Caching local data snapshots minimizes redundant API calls, reducing network overhead while maintaining a consistent "truth" for analysis.</a:t>
+            </a:r>
+          </a:p>
           <a:p>
             <a:pPr marL="0" marR="0" lvl="0" indent="0" algn="l" defTabSz="914400" rtl="0" eaLnBrk="0" fontAlgn="base" latinLnBrk="0" hangingPunct="0">
               <a:lnSpc>
@@ -2753,799 +3262,7 @@
               <a:buNone/>
               <a:tabLst/>
             </a:pPr>
-            <a:r>
-              <a:rPr kumimoji="0" lang="en-US" altLang="en-US" sz="8000" b="1" i="0" u="none" strike="noStrike" cap="none" normalizeH="0" baseline="0" dirty="0">
-                <a:ln>
-                  <a:noFill/>
-                </a:ln>
-                <a:solidFill>
-                  <a:schemeClr val="tx1"/>
-                </a:solidFill>
-                <a:effectLst/>
-                <a:latin typeface="Google Sans"/>
-              </a:rPr>
-              <a:t>1</a:t>
-            </a:r>
-            <a:r>
-              <a:rPr kumimoji="0" lang="en-US" altLang="en-US" sz="6600" b="1" i="0" u="none" strike="noStrike" cap="none" normalizeH="0" baseline="0" dirty="0">
-                <a:ln>
-                  <a:noFill/>
-                </a:ln>
-                <a:solidFill>
-                  <a:schemeClr val="tx1"/>
-                </a:solidFill>
-                <a:effectLst/>
-                <a:latin typeface="Google Sans"/>
-              </a:rPr>
-              <a:t>. Data Acquisition (Web Mining)</a:t>
-            </a:r>
-          </a:p>
-          <a:p>
-            <a:pPr marL="0" marR="0" lvl="0" indent="0" algn="l" defTabSz="914400" rtl="0" eaLnBrk="0" fontAlgn="base" latinLnBrk="0" hangingPunct="0">
-              <a:lnSpc>
-                <a:spcPct val="100000"/>
-              </a:lnSpc>
-              <a:spcBef>
-                <a:spcPct val="0"/>
-              </a:spcBef>
-              <a:spcAft>
-                <a:spcPct val="0"/>
-              </a:spcAft>
-              <a:buClrTx/>
-              <a:buSzTx/>
-              <a:buFontTx/>
-              <a:buChar char="•"/>
-              <a:tabLst/>
-            </a:pPr>
-            <a:r>
-              <a:rPr kumimoji="0" lang="en-US" altLang="en-US" sz="6600" b="1" i="0" u="none" strike="noStrike" cap="none" normalizeH="0" baseline="0" dirty="0">
-                <a:ln>
-                  <a:noFill/>
-                </a:ln>
-                <a:solidFill>
-                  <a:schemeClr val="tx1"/>
-                </a:solidFill>
-                <a:effectLst/>
-                <a:latin typeface="Google Sans Text"/>
-              </a:rPr>
-              <a:t>Primary Source:</a:t>
-            </a:r>
-            <a:r>
-              <a:rPr kumimoji="0" lang="en-US" altLang="en-US" sz="6600" b="0" i="0" u="none" strike="noStrike" cap="none" normalizeH="0" baseline="0" dirty="0">
-                <a:ln>
-                  <a:noFill/>
-                </a:ln>
-                <a:solidFill>
-                  <a:schemeClr val="tx1"/>
-                </a:solidFill>
-                <a:effectLst/>
-                <a:latin typeface="Google Sans Text"/>
-              </a:rPr>
-              <a:t> Utilized the </a:t>
-            </a:r>
-            <a:r>
-              <a:rPr kumimoji="0" lang="en-US" altLang="en-US" sz="6600" b="1" i="0" u="none" strike="noStrike" cap="none" normalizeH="0" baseline="0" dirty="0">
-                <a:ln>
-                  <a:noFill/>
-                </a:ln>
-                <a:solidFill>
-                  <a:schemeClr val="tx1"/>
-                </a:solidFill>
-                <a:effectLst/>
-                <a:latin typeface="Google Sans Text"/>
-              </a:rPr>
-              <a:t>OSRS Wiki Real-Time Prices API</a:t>
-            </a:r>
-            <a:r>
-              <a:rPr kumimoji="0" lang="en-US" altLang="en-US" sz="6600" b="0" i="0" u="none" strike="noStrike" cap="none" normalizeH="0" baseline="0" dirty="0">
-                <a:ln>
-                  <a:noFill/>
-                </a:ln>
-                <a:solidFill>
-                  <a:schemeClr val="tx1"/>
-                </a:solidFill>
-                <a:effectLst/>
-                <a:latin typeface="Google Sans Text"/>
-              </a:rPr>
-              <a:t> for high-frequency market data and the </a:t>
-            </a:r>
-            <a:r>
-              <a:rPr kumimoji="0" lang="en-US" altLang="en-US" sz="6600" b="1" i="0" u="none" strike="noStrike" cap="none" normalizeH="0" baseline="0" dirty="0">
-                <a:ln>
-                  <a:noFill/>
-                </a:ln>
-                <a:solidFill>
-                  <a:schemeClr val="tx1"/>
-                </a:solidFill>
-                <a:effectLst/>
-                <a:latin typeface="Google Sans Text"/>
-              </a:rPr>
-              <a:t>Mapping API</a:t>
-            </a:r>
-            <a:r>
-              <a:rPr kumimoji="0" lang="en-US" altLang="en-US" sz="6600" b="0" i="0" u="none" strike="noStrike" cap="none" normalizeH="0" baseline="0" dirty="0">
-                <a:ln>
-                  <a:noFill/>
-                </a:ln>
-                <a:solidFill>
-                  <a:schemeClr val="tx1"/>
-                </a:solidFill>
-                <a:effectLst/>
-                <a:latin typeface="Google Sans Text"/>
-              </a:rPr>
-              <a:t> for item metadata.</a:t>
-            </a:r>
-          </a:p>
-          <a:p>
-            <a:pPr marL="0" marR="0" lvl="0" indent="0" algn="l" defTabSz="914400" rtl="0" eaLnBrk="0" fontAlgn="base" latinLnBrk="0" hangingPunct="0">
-              <a:lnSpc>
-                <a:spcPct val="100000"/>
-              </a:lnSpc>
-              <a:spcBef>
-                <a:spcPct val="0"/>
-              </a:spcBef>
-              <a:spcAft>
-                <a:spcPct val="0"/>
-              </a:spcAft>
-              <a:buClrTx/>
-              <a:buSzTx/>
-              <a:buFontTx/>
-              <a:buChar char="•"/>
-              <a:tabLst/>
-            </a:pPr>
-            <a:r>
-              <a:rPr kumimoji="0" lang="en-US" altLang="en-US" sz="6600" b="1" i="0" u="none" strike="noStrike" cap="none" normalizeH="0" baseline="0" dirty="0">
-                <a:ln>
-                  <a:noFill/>
-                </a:ln>
-                <a:solidFill>
-                  <a:schemeClr val="tx1"/>
-                </a:solidFill>
-                <a:effectLst/>
-                <a:latin typeface="Google Sans Text"/>
-              </a:rPr>
-              <a:t>Compliance:</a:t>
-            </a:r>
-            <a:r>
-              <a:rPr kumimoji="0" lang="en-US" altLang="en-US" sz="6600" b="0" i="0" u="none" strike="noStrike" cap="none" normalizeH="0" baseline="0" dirty="0">
-                <a:ln>
-                  <a:noFill/>
-                </a:ln>
-                <a:solidFill>
-                  <a:schemeClr val="tx1"/>
-                </a:solidFill>
-                <a:effectLst/>
-                <a:latin typeface="Google Sans Text"/>
-              </a:rPr>
-              <a:t> Implemented a custom User-Agent header in Python to comply with the Wiki's Fair Use Policy, ensuring transparent and responsible data scraping.</a:t>
-            </a:r>
-          </a:p>
-          <a:p>
-            <a:pPr marL="0" marR="0" lvl="0" indent="0" algn="l" defTabSz="914400" rtl="0" eaLnBrk="0" fontAlgn="base" latinLnBrk="0" hangingPunct="0">
-              <a:lnSpc>
-                <a:spcPct val="100000"/>
-              </a:lnSpc>
-              <a:spcBef>
-                <a:spcPct val="0"/>
-              </a:spcBef>
-              <a:spcAft>
-                <a:spcPct val="0"/>
-              </a:spcAft>
-              <a:buClrTx/>
-              <a:buSzTx/>
-              <a:buFontTx/>
-              <a:buChar char="•"/>
-              <a:tabLst/>
-            </a:pPr>
-            <a:r>
-              <a:rPr kumimoji="0" lang="en-US" altLang="en-US" sz="6600" b="1" i="0" u="none" strike="noStrike" cap="none" normalizeH="0" baseline="0" dirty="0">
-                <a:ln>
-                  <a:noFill/>
-                </a:ln>
-                <a:solidFill>
-                  <a:schemeClr val="tx1"/>
-                </a:solidFill>
-                <a:effectLst/>
-                <a:latin typeface="Google Sans Text"/>
-              </a:rPr>
-              <a:t>Tooling:</a:t>
-            </a:r>
-            <a:r>
-              <a:rPr kumimoji="0" lang="en-US" altLang="en-US" sz="6600" b="0" i="0" u="none" strike="noStrike" cap="none" normalizeH="0" baseline="0" dirty="0">
-                <a:ln>
-                  <a:noFill/>
-                </a:ln>
-                <a:solidFill>
-                  <a:schemeClr val="tx1"/>
-                </a:solidFill>
-                <a:effectLst/>
-                <a:latin typeface="Google Sans Text"/>
-              </a:rPr>
-              <a:t> Used the requests library to fetch JSON payloads containing real-time "insta-buy" and "insta-sell" price points.</a:t>
-            </a:r>
-          </a:p>
-          <a:p>
-            <a:pPr marL="0" marR="0" lvl="0" indent="0" algn="l" defTabSz="914400" rtl="0" eaLnBrk="0" fontAlgn="base" latinLnBrk="0" hangingPunct="0">
-              <a:lnSpc>
-                <a:spcPct val="100000"/>
-              </a:lnSpc>
-              <a:spcBef>
-                <a:spcPct val="0"/>
-              </a:spcBef>
-              <a:spcAft>
-                <a:spcPct val="0"/>
-              </a:spcAft>
-              <a:buClrTx/>
-              <a:buSzTx/>
-              <a:buFontTx/>
-              <a:buNone/>
-              <a:tabLst/>
-            </a:pPr>
-            <a:endParaRPr kumimoji="0" lang="en-US" altLang="en-US" sz="6600" b="1" i="0" u="none" strike="noStrike" cap="none" normalizeH="0" baseline="0" dirty="0">
-              <a:ln>
-                <a:noFill/>
-              </a:ln>
-              <a:solidFill>
-                <a:schemeClr val="tx1"/>
-              </a:solidFill>
-              <a:effectLst/>
-              <a:latin typeface="Google Sans"/>
-            </a:endParaRPr>
-          </a:p>
-          <a:p>
-            <a:pPr marL="0" marR="0" lvl="0" indent="0" algn="l" defTabSz="914400" rtl="0" eaLnBrk="0" fontAlgn="base" latinLnBrk="0" hangingPunct="0">
-              <a:lnSpc>
-                <a:spcPct val="100000"/>
-              </a:lnSpc>
-              <a:spcBef>
-                <a:spcPct val="0"/>
-              </a:spcBef>
-              <a:spcAft>
-                <a:spcPct val="0"/>
-              </a:spcAft>
-              <a:buClrTx/>
-              <a:buSzTx/>
-              <a:buFontTx/>
-              <a:buNone/>
-              <a:tabLst/>
-            </a:pPr>
-            <a:r>
-              <a:rPr kumimoji="0" lang="en-US" altLang="en-US" sz="6600" b="1" i="0" u="none" strike="noStrike" cap="none" normalizeH="0" baseline="0" dirty="0">
-                <a:ln>
-                  <a:noFill/>
-                </a:ln>
-                <a:solidFill>
-                  <a:schemeClr val="tx1"/>
-                </a:solidFill>
-                <a:effectLst/>
-                <a:latin typeface="Google Sans"/>
-              </a:rPr>
-              <a:t>2. Data Transformation (Pandas)</a:t>
-            </a:r>
-          </a:p>
-          <a:p>
-            <a:pPr marL="0" marR="0" lvl="0" indent="0" algn="l" defTabSz="914400" rtl="0" eaLnBrk="0" fontAlgn="base" latinLnBrk="0" hangingPunct="0">
-              <a:lnSpc>
-                <a:spcPct val="100000"/>
-              </a:lnSpc>
-              <a:spcBef>
-                <a:spcPct val="0"/>
-              </a:spcBef>
-              <a:spcAft>
-                <a:spcPct val="0"/>
-              </a:spcAft>
-              <a:buClrTx/>
-              <a:buSzTx/>
-              <a:buFontTx/>
-              <a:buChar char="•"/>
-              <a:tabLst/>
-            </a:pPr>
-            <a:r>
-              <a:rPr kumimoji="0" lang="en-US" altLang="en-US" sz="6600" b="1" i="0" u="none" strike="noStrike" cap="none" normalizeH="0" baseline="0" dirty="0">
-                <a:ln>
-                  <a:noFill/>
-                </a:ln>
-                <a:solidFill>
-                  <a:schemeClr val="tx1"/>
-                </a:solidFill>
-                <a:effectLst/>
-                <a:latin typeface="Google Sans Text"/>
-              </a:rPr>
-              <a:t>Merging:</a:t>
-            </a:r>
-            <a:r>
-              <a:rPr kumimoji="0" lang="en-US" altLang="en-US" sz="6600" b="0" i="0" u="none" strike="noStrike" cap="none" normalizeH="0" baseline="0" dirty="0">
-                <a:ln>
-                  <a:noFill/>
-                </a:ln>
-                <a:solidFill>
-                  <a:schemeClr val="tx1"/>
-                </a:solidFill>
-                <a:effectLst/>
-                <a:latin typeface="Google Sans Text"/>
-              </a:rPr>
-              <a:t> Combined metadata (Item IDs, Names, Members-status) with live pricing data into a unified </a:t>
-            </a:r>
-            <a:r>
-              <a:rPr kumimoji="0" lang="en-US" altLang="en-US" sz="6600" b="1" i="0" u="none" strike="noStrike" cap="none" normalizeH="0" baseline="0" dirty="0">
-                <a:ln>
-                  <a:noFill/>
-                </a:ln>
-                <a:solidFill>
-                  <a:schemeClr val="tx1"/>
-                </a:solidFill>
-                <a:effectLst/>
-                <a:latin typeface="Google Sans Text"/>
-              </a:rPr>
-              <a:t>Pandas </a:t>
-            </a:r>
-            <a:r>
-              <a:rPr kumimoji="0" lang="en-US" altLang="en-US" sz="6600" b="1" i="0" u="none" strike="noStrike" cap="none" normalizeH="0" baseline="0" dirty="0" err="1">
-                <a:ln>
-                  <a:noFill/>
-                </a:ln>
-                <a:solidFill>
-                  <a:schemeClr val="tx1"/>
-                </a:solidFill>
-                <a:effectLst/>
-                <a:latin typeface="Google Sans Text"/>
-              </a:rPr>
-              <a:t>DataFrame</a:t>
-            </a:r>
-            <a:r>
-              <a:rPr kumimoji="0" lang="en-US" altLang="en-US" sz="6600" b="0" i="0" u="none" strike="noStrike" cap="none" normalizeH="0" baseline="0" dirty="0" err="1">
-                <a:ln>
-                  <a:noFill/>
-                </a:ln>
-                <a:solidFill>
-                  <a:schemeClr val="tx1"/>
-                </a:solidFill>
-                <a:effectLst/>
-                <a:latin typeface="Google Sans Text"/>
-              </a:rPr>
-              <a:t>.</a:t>
-            </a:r>
-            <a:r>
-              <a:rPr kumimoji="0" lang="en-US" altLang="en-US" sz="6600" b="1" i="0" u="none" strike="noStrike" cap="none" normalizeH="0" baseline="0" dirty="0" err="1">
-                <a:ln>
-                  <a:noFill/>
-                </a:ln>
-                <a:solidFill>
-                  <a:schemeClr val="tx1"/>
-                </a:solidFill>
-                <a:effectLst/>
-                <a:latin typeface="Google Sans Text"/>
-              </a:rPr>
-              <a:t>Feature</a:t>
-            </a:r>
-            <a:r>
-              <a:rPr kumimoji="0" lang="en-US" altLang="en-US" sz="6600" b="1" i="0" u="none" strike="noStrike" cap="none" normalizeH="0" baseline="0" dirty="0">
-                <a:ln>
-                  <a:noFill/>
-                </a:ln>
-                <a:solidFill>
-                  <a:schemeClr val="tx1"/>
-                </a:solidFill>
-                <a:effectLst/>
-                <a:latin typeface="Google Sans Text"/>
-              </a:rPr>
-              <a:t> Engineering:</a:t>
-            </a:r>
-            <a:r>
-              <a:rPr kumimoji="0" lang="en-US" altLang="en-US" sz="6600" b="0" i="0" u="none" strike="noStrike" cap="none" normalizeH="0" baseline="0" dirty="0">
-                <a:ln>
-                  <a:noFill/>
-                </a:ln>
-                <a:solidFill>
-                  <a:schemeClr val="tx1"/>
-                </a:solidFill>
-                <a:effectLst/>
-                <a:latin typeface="Google Sans Text"/>
-              </a:rPr>
-              <a:t> Calculated derived metrics for analysis:</a:t>
-            </a:r>
-          </a:p>
-          <a:p>
-            <a:pPr marL="457200" marR="0" lvl="1" indent="0" algn="l" defTabSz="914400" rtl="0" eaLnBrk="0" fontAlgn="base" latinLnBrk="0" hangingPunct="0">
-              <a:lnSpc>
-                <a:spcPct val="100000"/>
-              </a:lnSpc>
-              <a:spcBef>
-                <a:spcPct val="0"/>
-              </a:spcBef>
-              <a:spcAft>
-                <a:spcPct val="0"/>
-              </a:spcAft>
-              <a:buClrTx/>
-              <a:buSzTx/>
-              <a:buFontTx/>
-              <a:buChar char="•"/>
-              <a:tabLst/>
-            </a:pPr>
-            <a:r>
-              <a:rPr kumimoji="0" lang="en-US" altLang="en-US" sz="6600" b="1" i="0" u="none" strike="noStrike" cap="none" normalizeH="0" baseline="0" dirty="0">
-                <a:ln>
-                  <a:noFill/>
-                </a:ln>
-                <a:solidFill>
-                  <a:schemeClr val="tx1"/>
-                </a:solidFill>
-                <a:effectLst/>
-                <a:latin typeface="Google Sans Text"/>
-              </a:rPr>
-              <a:t>Margin Percentage:</a:t>
-            </a:r>
-            <a:r>
-              <a:rPr kumimoji="0" lang="en-US" altLang="en-US" sz="6600" b="0" i="0" u="none" strike="noStrike" cap="none" normalizeH="0" baseline="0" dirty="0">
-                <a:ln>
-                  <a:noFill/>
-                </a:ln>
-                <a:solidFill>
-                  <a:schemeClr val="tx1"/>
-                </a:solidFill>
-                <a:effectLst/>
-                <a:latin typeface="Google Sans Text"/>
-              </a:rPr>
-              <a:t> $((High - Low) / Low) \times 100$</a:t>
-            </a:r>
-          </a:p>
-          <a:p>
-            <a:pPr marL="457200" marR="0" lvl="1" indent="0" algn="l" defTabSz="914400" rtl="0" eaLnBrk="0" fontAlgn="base" latinLnBrk="0" hangingPunct="0">
-              <a:lnSpc>
-                <a:spcPct val="100000"/>
-              </a:lnSpc>
-              <a:spcBef>
-                <a:spcPct val="0"/>
-              </a:spcBef>
-              <a:spcAft>
-                <a:spcPct val="0"/>
-              </a:spcAft>
-              <a:buClrTx/>
-              <a:buSzTx/>
-              <a:buFontTx/>
-              <a:buChar char="•"/>
-              <a:tabLst/>
-            </a:pPr>
-            <a:r>
-              <a:rPr kumimoji="0" lang="en-US" altLang="en-US" sz="6600" b="1" i="0" u="none" strike="noStrike" cap="none" normalizeH="0" baseline="0" dirty="0">
-                <a:ln>
-                  <a:noFill/>
-                </a:ln>
-                <a:solidFill>
-                  <a:schemeClr val="tx1"/>
-                </a:solidFill>
-                <a:effectLst/>
-                <a:latin typeface="Google Sans Text"/>
-              </a:rPr>
-              <a:t>Absolute Spread:</a:t>
-            </a:r>
-            <a:r>
-              <a:rPr kumimoji="0" lang="en-US" altLang="en-US" sz="6600" b="0" i="0" u="none" strike="noStrike" cap="none" normalizeH="0" baseline="0" dirty="0">
-                <a:ln>
-                  <a:noFill/>
-                </a:ln>
-                <a:solidFill>
-                  <a:schemeClr val="tx1"/>
-                </a:solidFill>
-                <a:effectLst/>
-                <a:latin typeface="Google Sans Text"/>
-              </a:rPr>
-              <a:t> $High - Low$</a:t>
-            </a:r>
-          </a:p>
-          <a:p>
-            <a:pPr marL="0" marR="0" lvl="0" indent="0" algn="l" defTabSz="914400" rtl="0" eaLnBrk="0" fontAlgn="base" latinLnBrk="0" hangingPunct="0">
-              <a:lnSpc>
-                <a:spcPct val="100000"/>
-              </a:lnSpc>
-              <a:spcBef>
-                <a:spcPct val="0"/>
-              </a:spcBef>
-              <a:spcAft>
-                <a:spcPct val="0"/>
-              </a:spcAft>
-              <a:buClrTx/>
-              <a:buSzTx/>
-              <a:buFontTx/>
-              <a:buChar char="•"/>
-              <a:tabLst/>
-            </a:pPr>
-            <a:r>
-              <a:rPr kumimoji="0" lang="en-US" altLang="en-US" sz="6600" b="1" i="0" u="none" strike="noStrike" cap="none" normalizeH="0" baseline="0" dirty="0">
-                <a:ln>
-                  <a:noFill/>
-                </a:ln>
-                <a:solidFill>
-                  <a:schemeClr val="tx1"/>
-                </a:solidFill>
-                <a:effectLst/>
-                <a:latin typeface="Google Sans Text"/>
-              </a:rPr>
-              <a:t>Data Cleaning:</a:t>
-            </a:r>
-            <a:r>
-              <a:rPr kumimoji="0" lang="en-US" altLang="en-US" sz="6600" b="0" i="0" u="none" strike="noStrike" cap="none" normalizeH="0" baseline="0" dirty="0">
-                <a:ln>
-                  <a:noFill/>
-                </a:ln>
-                <a:solidFill>
-                  <a:schemeClr val="tx1"/>
-                </a:solidFill>
-                <a:effectLst/>
-                <a:latin typeface="Google Sans Text"/>
-              </a:rPr>
-              <a:t> Filtered out items with zero trading volume to eliminate "noise" and focus on viable market opportunities.</a:t>
-            </a:r>
-          </a:p>
-          <a:p>
-            <a:pPr marL="0" marR="0" lvl="0" indent="0" algn="l" defTabSz="914400" rtl="0" eaLnBrk="0" fontAlgn="base" latinLnBrk="0" hangingPunct="0">
-              <a:lnSpc>
-                <a:spcPct val="100000"/>
-              </a:lnSpc>
-              <a:spcBef>
-                <a:spcPct val="0"/>
-              </a:spcBef>
-              <a:spcAft>
-                <a:spcPct val="0"/>
-              </a:spcAft>
-              <a:buClrTx/>
-              <a:buSzTx/>
-              <a:buFontTx/>
-              <a:buNone/>
-              <a:tabLst/>
-            </a:pPr>
-            <a:endParaRPr kumimoji="0" lang="en-US" altLang="en-US" sz="6600" b="1" i="0" u="none" strike="noStrike" cap="none" normalizeH="0" baseline="0" dirty="0">
-              <a:ln>
-                <a:noFill/>
-              </a:ln>
-              <a:solidFill>
-                <a:schemeClr val="tx1"/>
-              </a:solidFill>
-              <a:effectLst/>
-              <a:latin typeface="Google Sans"/>
-            </a:endParaRPr>
-          </a:p>
-          <a:p>
-            <a:pPr marL="0" marR="0" lvl="0" indent="0" algn="l" defTabSz="914400" rtl="0" eaLnBrk="0" fontAlgn="base" latinLnBrk="0" hangingPunct="0">
-              <a:lnSpc>
-                <a:spcPct val="100000"/>
-              </a:lnSpc>
-              <a:spcBef>
-                <a:spcPct val="0"/>
-              </a:spcBef>
-              <a:spcAft>
-                <a:spcPct val="0"/>
-              </a:spcAft>
-              <a:buClrTx/>
-              <a:buSzTx/>
-              <a:buFontTx/>
-              <a:buNone/>
-              <a:tabLst/>
-            </a:pPr>
-            <a:r>
-              <a:rPr kumimoji="0" lang="en-US" altLang="en-US" sz="6600" b="1" i="0" u="none" strike="noStrike" cap="none" normalizeH="0" baseline="0" dirty="0">
-                <a:ln>
-                  <a:noFill/>
-                </a:ln>
-                <a:solidFill>
-                  <a:schemeClr val="tx1"/>
-                </a:solidFill>
-                <a:effectLst/>
-                <a:latin typeface="Google Sans"/>
-              </a:rPr>
-              <a:t>3. Storage &amp; Caching (Pickle)</a:t>
-            </a:r>
-          </a:p>
-          <a:p>
-            <a:pPr marL="0" marR="0" lvl="0" indent="0" algn="l" defTabSz="914400" rtl="0" eaLnBrk="0" fontAlgn="base" latinLnBrk="0" hangingPunct="0">
-              <a:lnSpc>
-                <a:spcPct val="100000"/>
-              </a:lnSpc>
-              <a:spcBef>
-                <a:spcPct val="0"/>
-              </a:spcBef>
-              <a:spcAft>
-                <a:spcPct val="0"/>
-              </a:spcAft>
-              <a:buClrTx/>
-              <a:buSzTx/>
-              <a:buFontTx/>
-              <a:buChar char="•"/>
-              <a:tabLst/>
-            </a:pPr>
-            <a:r>
-              <a:rPr kumimoji="0" lang="en-US" altLang="en-US" sz="6600" b="1" i="0" u="none" strike="noStrike" cap="none" normalizeH="0" baseline="0" dirty="0">
-                <a:ln>
-                  <a:noFill/>
-                </a:ln>
-                <a:solidFill>
-                  <a:schemeClr val="tx1"/>
-                </a:solidFill>
-                <a:effectLst/>
-                <a:latin typeface="Google Sans Text"/>
-              </a:rPr>
-              <a:t>Serialization:</a:t>
-            </a:r>
-            <a:r>
-              <a:rPr kumimoji="0" lang="en-US" altLang="en-US" sz="6600" b="0" i="0" u="none" strike="noStrike" cap="none" normalizeH="0" baseline="0" dirty="0">
-                <a:ln>
-                  <a:noFill/>
-                </a:ln>
-                <a:solidFill>
-                  <a:schemeClr val="tx1"/>
-                </a:solidFill>
-                <a:effectLst/>
-                <a:latin typeface="Google Sans Text"/>
-              </a:rPr>
-              <a:t> Employed the pickle library to save processed </a:t>
-            </a:r>
-            <a:r>
-              <a:rPr kumimoji="0" lang="en-US" altLang="en-US" sz="6600" b="0" i="0" u="none" strike="noStrike" cap="none" normalizeH="0" baseline="0" dirty="0" err="1">
-                <a:ln>
-                  <a:noFill/>
-                </a:ln>
-                <a:solidFill>
-                  <a:schemeClr val="tx1"/>
-                </a:solidFill>
-                <a:effectLst/>
-                <a:latin typeface="Google Sans Text"/>
-              </a:rPr>
-              <a:t>dataframes</a:t>
-            </a:r>
-            <a:r>
-              <a:rPr kumimoji="0" lang="en-US" altLang="en-US" sz="6600" b="0" i="0" u="none" strike="noStrike" cap="none" normalizeH="0" baseline="0" dirty="0">
-                <a:ln>
-                  <a:noFill/>
-                </a:ln>
-                <a:solidFill>
-                  <a:schemeClr val="tx1"/>
-                </a:solidFill>
-                <a:effectLst/>
-                <a:latin typeface="Google Sans Text"/>
-              </a:rPr>
-              <a:t> as .</a:t>
-            </a:r>
-            <a:r>
-              <a:rPr kumimoji="0" lang="en-US" altLang="en-US" sz="6600" b="0" i="0" u="none" strike="noStrike" cap="none" normalizeH="0" baseline="0" dirty="0" err="1">
-                <a:ln>
-                  <a:noFill/>
-                </a:ln>
-                <a:solidFill>
-                  <a:schemeClr val="tx1"/>
-                </a:solidFill>
-                <a:effectLst/>
-                <a:latin typeface="Google Sans Text"/>
-              </a:rPr>
-              <a:t>pkl</a:t>
-            </a:r>
-            <a:r>
-              <a:rPr kumimoji="0" lang="en-US" altLang="en-US" sz="6600" b="0" i="0" u="none" strike="noStrike" cap="none" normalizeH="0" baseline="0" dirty="0">
-                <a:ln>
-                  <a:noFill/>
-                </a:ln>
-                <a:solidFill>
-                  <a:schemeClr val="tx1"/>
-                </a:solidFill>
-                <a:effectLst/>
-                <a:latin typeface="Google Sans Text"/>
-              </a:rPr>
-              <a:t> files (</a:t>
-            </a:r>
-            <a:r>
-              <a:rPr kumimoji="0" lang="en-US" altLang="en-US" sz="6600" b="0" i="0" u="none" strike="noStrike" cap="none" normalizeH="0" baseline="0" dirty="0" err="1">
-                <a:ln>
-                  <a:noFill/>
-                </a:ln>
-                <a:solidFill>
-                  <a:schemeClr val="tx1"/>
-                </a:solidFill>
-                <a:effectLst/>
-                <a:latin typeface="Google Sans Text"/>
-              </a:rPr>
-              <a:t>ge_data_cache.pkl</a:t>
-            </a:r>
-            <a:r>
-              <a:rPr kumimoji="0" lang="en-US" altLang="en-US" sz="6600" b="0" i="0" u="none" strike="noStrike" cap="none" normalizeH="0" baseline="0" dirty="0">
-                <a:ln>
-                  <a:noFill/>
-                </a:ln>
-                <a:solidFill>
-                  <a:schemeClr val="tx1"/>
-                </a:solidFill>
-                <a:effectLst/>
-                <a:latin typeface="Google Sans Text"/>
-              </a:rPr>
-              <a:t>).</a:t>
-            </a:r>
-          </a:p>
-          <a:p>
-            <a:pPr marL="0" marR="0" lvl="0" indent="0" algn="l" defTabSz="914400" rtl="0" eaLnBrk="0" fontAlgn="base" latinLnBrk="0" hangingPunct="0">
-              <a:lnSpc>
-                <a:spcPct val="100000"/>
-              </a:lnSpc>
-              <a:spcBef>
-                <a:spcPct val="0"/>
-              </a:spcBef>
-              <a:spcAft>
-                <a:spcPct val="0"/>
-              </a:spcAft>
-              <a:buClrTx/>
-              <a:buSzTx/>
-              <a:buFontTx/>
-              <a:buChar char="•"/>
-              <a:tabLst/>
-            </a:pPr>
-            <a:r>
-              <a:rPr kumimoji="0" lang="en-US" altLang="en-US" sz="6600" b="1" i="0" u="none" strike="noStrike" cap="none" normalizeH="0" baseline="0" dirty="0">
-                <a:ln>
-                  <a:noFill/>
-                </a:ln>
-                <a:solidFill>
-                  <a:schemeClr val="tx1"/>
-                </a:solidFill>
-                <a:effectLst/>
-                <a:latin typeface="Google Sans Text"/>
-              </a:rPr>
-              <a:t>Efficiency:</a:t>
-            </a:r>
-            <a:r>
-              <a:rPr kumimoji="0" lang="en-US" altLang="en-US" sz="6600" b="0" i="0" u="none" strike="noStrike" cap="none" normalizeH="0" baseline="0" dirty="0">
-                <a:ln>
-                  <a:noFill/>
-                </a:ln>
-                <a:solidFill>
-                  <a:schemeClr val="tx1"/>
-                </a:solidFill>
-                <a:effectLst/>
-                <a:latin typeface="Google Sans Text"/>
-              </a:rPr>
-              <a:t> Caching allows for rapid data reloading without redundant API calls, preserving the integrity of </a:t>
-            </a:r>
-            <a:r>
-              <a:rPr kumimoji="0" lang="en-US" altLang="en-US" sz="6600" b="1" i="0" u="none" strike="noStrike" cap="none" normalizeH="0" baseline="0" dirty="0">
-                <a:ln>
-                  <a:noFill/>
-                </a:ln>
-                <a:solidFill>
-                  <a:schemeClr val="tx1"/>
-                </a:solidFill>
-                <a:effectLst/>
-                <a:latin typeface="Google Sans Text"/>
-              </a:rPr>
-              <a:t>UTC timestamps</a:t>
-            </a:r>
-            <a:r>
-              <a:rPr kumimoji="0" lang="en-US" altLang="en-US" sz="6600" b="0" i="0" u="none" strike="noStrike" cap="none" normalizeH="0" baseline="0" dirty="0">
-                <a:ln>
-                  <a:noFill/>
-                </a:ln>
-                <a:solidFill>
-                  <a:schemeClr val="tx1"/>
-                </a:solidFill>
-                <a:effectLst/>
-                <a:latin typeface="Google Sans Text"/>
-              </a:rPr>
-              <a:t> for time-series analysis.</a:t>
-            </a:r>
-          </a:p>
-          <a:p>
-            <a:pPr marL="0" marR="0" lvl="0" indent="0" algn="l" defTabSz="914400" rtl="0" eaLnBrk="0" fontAlgn="base" latinLnBrk="0" hangingPunct="0">
-              <a:lnSpc>
-                <a:spcPct val="100000"/>
-              </a:lnSpc>
-              <a:spcBef>
-                <a:spcPct val="0"/>
-              </a:spcBef>
-              <a:spcAft>
-                <a:spcPct val="0"/>
-              </a:spcAft>
-              <a:buClrTx/>
-              <a:buSzTx/>
-              <a:buFontTx/>
-              <a:buNone/>
-              <a:tabLst/>
-            </a:pPr>
-            <a:endParaRPr kumimoji="0" lang="en-US" altLang="en-US" sz="1800" b="0" i="0" u="none" strike="noStrike" cap="none" normalizeH="0" baseline="0" dirty="0">
+            <a:endParaRPr kumimoji="0" lang="en-US" altLang="en-US" sz="6600" b="0" i="0" u="none" strike="noStrike" cap="none" normalizeH="0" baseline="0" dirty="0">
               <a:ln>
                 <a:noFill/>
               </a:ln>
@@ -3837,6 +3554,550 @@
           </a:prstGeom>
         </p:spPr>
       </p:pic>
+      <p:sp>
+        <p:nvSpPr>
+          <p:cNvPr id="3" name="Rectangle 2">
+            <a:extLst>
+              <a:ext uri="{FF2B5EF4-FFF2-40B4-BE49-F238E27FC236}">
+                <a16:creationId xmlns:a16="http://schemas.microsoft.com/office/drawing/2014/main" id="{B90CC9E8-6EA7-F758-1D45-742F3301332D}"/>
+              </a:ext>
+            </a:extLst>
+          </p:cNvPr>
+          <p:cNvSpPr>
+            <a:spLocks noChangeArrowheads="1"/>
+          </p:cNvSpPr>
+          <p:nvPr/>
+        </p:nvSpPr>
+        <p:spPr bwMode="auto">
+          <a:xfrm>
+            <a:off x="1456267" y="7332600"/>
+            <a:ext cx="12869333" cy="22483078"/>
+          </a:xfrm>
+          <a:prstGeom prst="rect">
+            <a:avLst/>
+          </a:prstGeom>
+          <a:noFill/>
+          <a:ln>
+            <a:noFill/>
+          </a:ln>
+          <a:effectLst/>
+          <a:extLst>
+            <a:ext uri="{909E8E84-426E-40DD-AFC4-6F175D3DCCD1}">
+              <a14:hiddenFill xmlns:a14="http://schemas.microsoft.com/office/drawing/2010/main">
+                <a:solidFill>
+                  <a:schemeClr val="accent1"/>
+                </a:solidFill>
+              </a14:hiddenFill>
+            </a:ext>
+            <a:ext uri="{91240B29-F687-4F45-9708-019B960494DF}">
+              <a14:hiddenLine xmlns:a14="http://schemas.microsoft.com/office/drawing/2010/main" w="9525">
+                <a:solidFill>
+                  <a:schemeClr val="tx1"/>
+                </a:solidFill>
+                <a:miter lim="800000"/>
+                <a:headEnd/>
+                <a:tailEnd/>
+              </a14:hiddenLine>
+            </a:ext>
+            <a:ext uri="{AF507438-7753-43E0-B8FC-AC1667EBCBE1}">
+              <a14:hiddenEffects xmlns:a14="http://schemas.microsoft.com/office/drawing/2010/main">
+                <a:effectLst>
+                  <a:outerShdw dist="35921" dir="2700000" algn="ctr" rotWithShape="0">
+                    <a:schemeClr val="bg2"/>
+                  </a:outerShdw>
+                </a:effectLst>
+              </a14:hiddenEffects>
+            </a:ext>
+          </a:extLst>
+        </p:spPr>
+        <p:txBody>
+          <a:bodyPr vert="horz" wrap="square" lIns="91440" tIns="0" rIns="91440" bIns="45720" numCol="1" anchor="ctr" anchorCtr="0" compatLnSpc="1">
+            <a:prstTxWarp prst="textNoShape">
+              <a:avLst/>
+            </a:prstTxWarp>
+            <a:spAutoFit/>
+          </a:bodyPr>
+          <a:lstStyle/>
+          <a:p>
+            <a:pPr marL="0" marR="0" lvl="0" indent="0" algn="l" defTabSz="914400" rtl="0" eaLnBrk="0" fontAlgn="base" latinLnBrk="0" hangingPunct="0">
+              <a:lnSpc>
+                <a:spcPct val="100000"/>
+              </a:lnSpc>
+              <a:spcBef>
+                <a:spcPct val="0"/>
+              </a:spcBef>
+              <a:spcAft>
+                <a:spcPct val="0"/>
+              </a:spcAft>
+              <a:buClrTx/>
+              <a:buSzTx/>
+              <a:buFontTx/>
+              <a:buNone/>
+              <a:tabLst/>
+            </a:pPr>
+            <a:r>
+              <a:rPr kumimoji="0" lang="en-US" altLang="en-US" sz="5400" b="1" i="0" u="none" strike="noStrike" cap="none" normalizeH="0" baseline="0" dirty="0">
+                <a:ln>
+                  <a:noFill/>
+                </a:ln>
+                <a:solidFill>
+                  <a:schemeClr val="tx1"/>
+                </a:solidFill>
+                <a:effectLst/>
+                <a:latin typeface="Google Sans Text"/>
+              </a:rPr>
+              <a:t>. Data Engineering (The Pandas Pipeline)</a:t>
+            </a:r>
+            <a:endParaRPr kumimoji="0" lang="en-US" altLang="en-US" sz="5400" b="0" i="0" u="none" strike="noStrike" cap="none" normalizeH="0" baseline="0" dirty="0">
+              <a:ln>
+                <a:noFill/>
+              </a:ln>
+              <a:solidFill>
+                <a:schemeClr val="tx1"/>
+              </a:solidFill>
+              <a:effectLst/>
+            </a:endParaRPr>
+          </a:p>
+          <a:p>
+            <a:pPr marL="0" marR="0" lvl="0" indent="0" algn="l" defTabSz="914400" rtl="0" eaLnBrk="0" fontAlgn="base" latinLnBrk="0" hangingPunct="0">
+              <a:lnSpc>
+                <a:spcPct val="100000"/>
+              </a:lnSpc>
+              <a:spcBef>
+                <a:spcPct val="0"/>
+              </a:spcBef>
+              <a:spcAft>
+                <a:spcPct val="0"/>
+              </a:spcAft>
+              <a:buClrTx/>
+              <a:buSzTx/>
+              <a:buFontTx/>
+              <a:buChar char="•"/>
+              <a:tabLst/>
+            </a:pPr>
+            <a:r>
+              <a:rPr kumimoji="0" lang="en-US" altLang="en-US" sz="5400" b="1" i="0" u="none" strike="noStrike" cap="none" normalizeH="0" baseline="0" dirty="0">
+                <a:ln>
+                  <a:noFill/>
+                </a:ln>
+                <a:solidFill>
+                  <a:schemeClr val="tx1"/>
+                </a:solidFill>
+                <a:effectLst/>
+                <a:latin typeface="Google Sans Text"/>
+              </a:rPr>
+              <a:t>Relational Merging:</a:t>
+            </a:r>
+            <a:r>
+              <a:rPr kumimoji="0" lang="en-US" altLang="en-US" sz="5400" b="0" i="0" u="none" strike="noStrike" cap="none" normalizeH="0" baseline="0" dirty="0">
+                <a:ln>
+                  <a:noFill/>
+                </a:ln>
+                <a:solidFill>
+                  <a:schemeClr val="tx1"/>
+                </a:solidFill>
+                <a:effectLst/>
+                <a:latin typeface="Google Sans Text"/>
+              </a:rPr>
+              <a:t> Performed a join between Item IDs, Names, and Members-status to contextualize raw price values.</a:t>
+            </a:r>
+          </a:p>
+          <a:p>
+            <a:pPr marL="0" marR="0" lvl="0" indent="0" algn="l" defTabSz="914400" rtl="0" eaLnBrk="0" fontAlgn="base" latinLnBrk="0" hangingPunct="0">
+              <a:lnSpc>
+                <a:spcPct val="100000"/>
+              </a:lnSpc>
+              <a:spcBef>
+                <a:spcPct val="0"/>
+              </a:spcBef>
+              <a:spcAft>
+                <a:spcPct val="0"/>
+              </a:spcAft>
+              <a:buClrTx/>
+              <a:buSzTx/>
+              <a:buFontTx/>
+              <a:buChar char="•"/>
+              <a:tabLst/>
+            </a:pPr>
+            <a:r>
+              <a:rPr kumimoji="0" lang="en-US" altLang="en-US" sz="5400" b="1" i="0" u="none" strike="noStrike" cap="none" normalizeH="0" baseline="0" dirty="0">
+                <a:ln>
+                  <a:noFill/>
+                </a:ln>
+                <a:solidFill>
+                  <a:schemeClr val="tx1"/>
+                </a:solidFill>
+                <a:effectLst/>
+                <a:latin typeface="Google Sans Text"/>
+              </a:rPr>
+              <a:t>Noise Reduction:</a:t>
+            </a:r>
+            <a:r>
+              <a:rPr kumimoji="0" lang="en-US" altLang="en-US" sz="5400" b="0" i="0" u="none" strike="noStrike" cap="none" normalizeH="0" baseline="0" dirty="0">
+                <a:ln>
+                  <a:noFill/>
+                </a:ln>
+                <a:solidFill>
+                  <a:schemeClr val="tx1"/>
+                </a:solidFill>
+                <a:effectLst/>
+                <a:latin typeface="Google Sans Text"/>
+              </a:rPr>
+              <a:t> Filtered out "dead" items with zero trading volume. This ensures the data represents an active, tradeable market rather than theoretical values.</a:t>
+            </a:r>
+          </a:p>
+          <a:p>
+            <a:pPr marL="0" marR="0" lvl="0" indent="0" algn="l" defTabSz="914400" rtl="0" eaLnBrk="0" fontAlgn="base" latinLnBrk="0" hangingPunct="0">
+              <a:lnSpc>
+                <a:spcPct val="100000"/>
+              </a:lnSpc>
+              <a:spcBef>
+                <a:spcPct val="0"/>
+              </a:spcBef>
+              <a:spcAft>
+                <a:spcPct val="0"/>
+              </a:spcAft>
+              <a:buClrTx/>
+              <a:buSzTx/>
+              <a:buFontTx/>
+              <a:buNone/>
+              <a:tabLst/>
+            </a:pPr>
+            <a:r>
+              <a:rPr kumimoji="0" lang="en-US" altLang="en-US" sz="5400" b="1" i="0" u="none" strike="noStrike" cap="none" normalizeH="0" baseline="0" dirty="0">
+                <a:ln>
+                  <a:noFill/>
+                </a:ln>
+                <a:solidFill>
+                  <a:schemeClr val="tx1"/>
+                </a:solidFill>
+                <a:effectLst/>
+                <a:latin typeface="Google Sans Text"/>
+              </a:rPr>
+              <a:t>2. Feature Engineering for Analysis</a:t>
+            </a:r>
+            <a:endParaRPr kumimoji="0" lang="en-US" altLang="en-US" sz="5400" b="0" i="0" u="none" strike="noStrike" cap="none" normalizeH="0" baseline="0" dirty="0">
+              <a:ln>
+                <a:noFill/>
+              </a:ln>
+              <a:solidFill>
+                <a:schemeClr val="tx1"/>
+              </a:solidFill>
+              <a:effectLst/>
+            </a:endParaRPr>
+          </a:p>
+          <a:p>
+            <a:pPr marL="0" marR="0" lvl="0" indent="0" algn="l" defTabSz="914400" rtl="0" eaLnBrk="0" fontAlgn="base" latinLnBrk="0" hangingPunct="0">
+              <a:lnSpc>
+                <a:spcPct val="100000"/>
+              </a:lnSpc>
+              <a:spcBef>
+                <a:spcPct val="0"/>
+              </a:spcBef>
+              <a:spcAft>
+                <a:spcPct val="0"/>
+              </a:spcAft>
+              <a:buClrTx/>
+              <a:buSzTx/>
+              <a:buFontTx/>
+              <a:buNone/>
+              <a:tabLst/>
+            </a:pPr>
+            <a:r>
+              <a:rPr kumimoji="0" lang="en-US" altLang="en-US" sz="5400" b="0" i="0" u="none" strike="noStrike" cap="none" normalizeH="0" baseline="0" dirty="0">
+                <a:ln>
+                  <a:noFill/>
+                </a:ln>
+                <a:solidFill>
+                  <a:schemeClr val="tx1"/>
+                </a:solidFill>
+                <a:effectLst/>
+                <a:latin typeface="Google Sans Text"/>
+              </a:rPr>
+              <a:t>To move from raw numbers to market strategy, we calculated:</a:t>
+            </a:r>
+            <a:endParaRPr kumimoji="0" lang="en-US" altLang="en-US" sz="5400" b="0" i="0" u="none" strike="noStrike" cap="none" normalizeH="0" baseline="0" dirty="0">
+              <a:ln>
+                <a:noFill/>
+              </a:ln>
+              <a:solidFill>
+                <a:schemeClr val="tx1"/>
+              </a:solidFill>
+              <a:effectLst/>
+            </a:endParaRPr>
+          </a:p>
+          <a:p>
+            <a:pPr marL="0" marR="0" lvl="0" indent="0" algn="l" defTabSz="914400" rtl="0" eaLnBrk="0" fontAlgn="base" latinLnBrk="0" hangingPunct="0">
+              <a:lnSpc>
+                <a:spcPct val="100000"/>
+              </a:lnSpc>
+              <a:spcBef>
+                <a:spcPct val="0"/>
+              </a:spcBef>
+              <a:spcAft>
+                <a:spcPct val="0"/>
+              </a:spcAft>
+              <a:buClrTx/>
+              <a:buSzTx/>
+              <a:buFontTx/>
+              <a:buChar char="•"/>
+              <a:tabLst/>
+            </a:pPr>
+            <a:r>
+              <a:rPr kumimoji="0" lang="en-US" altLang="en-US" sz="5400" b="1" i="0" u="none" strike="noStrike" cap="none" normalizeH="0" baseline="0" dirty="0">
+                <a:ln>
+                  <a:noFill/>
+                </a:ln>
+                <a:solidFill>
+                  <a:schemeClr val="tx1"/>
+                </a:solidFill>
+                <a:effectLst/>
+                <a:latin typeface="Google Sans Text"/>
+              </a:rPr>
+              <a:t>Absolute Spread:</a:t>
+            </a:r>
+            <a:r>
+              <a:rPr kumimoji="0" lang="en-US" altLang="en-US" sz="5400" b="0" i="0" u="none" strike="noStrike" cap="none" normalizeH="0" baseline="0" dirty="0">
+                <a:ln>
+                  <a:noFill/>
+                </a:ln>
+                <a:solidFill>
+                  <a:schemeClr val="tx1"/>
+                </a:solidFill>
+                <a:effectLst/>
+                <a:latin typeface="Google Sans Text"/>
+              </a:rPr>
+              <a:t> $High - Low$ (Gross profit potential per unit).</a:t>
+            </a:r>
+          </a:p>
+          <a:p>
+            <a:pPr marL="0" marR="0" lvl="0" indent="0" algn="l" defTabSz="914400" rtl="0" eaLnBrk="0" fontAlgn="base" latinLnBrk="0" hangingPunct="0">
+              <a:lnSpc>
+                <a:spcPct val="100000"/>
+              </a:lnSpc>
+              <a:spcBef>
+                <a:spcPct val="0"/>
+              </a:spcBef>
+              <a:spcAft>
+                <a:spcPct val="0"/>
+              </a:spcAft>
+              <a:buClrTx/>
+              <a:buSzTx/>
+              <a:buFontTx/>
+              <a:buChar char="•"/>
+              <a:tabLst/>
+            </a:pPr>
+            <a:r>
+              <a:rPr kumimoji="0" lang="en-US" altLang="en-US" sz="5400" b="1" i="0" u="none" strike="noStrike" cap="none" normalizeH="0" baseline="0" dirty="0">
+                <a:ln>
+                  <a:noFill/>
+                </a:ln>
+                <a:solidFill>
+                  <a:schemeClr val="tx1"/>
+                </a:solidFill>
+                <a:effectLst/>
+                <a:latin typeface="Google Sans Text"/>
+              </a:rPr>
+              <a:t>Margin Percentage</a:t>
+            </a:r>
+            <a:r>
+              <a:rPr kumimoji="0" lang="en-US" altLang="en-US" sz="5400" b="1" i="0" u="none" strike="noStrike" cap="none" normalizeH="0" baseline="0">
+                <a:ln>
+                  <a:noFill/>
+                </a:ln>
+                <a:solidFill>
+                  <a:schemeClr val="tx1"/>
+                </a:solidFill>
+                <a:effectLst/>
+                <a:latin typeface="Google Sans Text"/>
+              </a:rPr>
+              <a:t>:</a:t>
+            </a:r>
+            <a:r>
+              <a:rPr kumimoji="0" lang="en-US" altLang="en-US" sz="5400" b="0" i="0" u="none" strike="noStrike" cap="none" normalizeH="0" baseline="0">
+                <a:ln>
+                  <a:noFill/>
+                </a:ln>
+                <a:solidFill>
+                  <a:schemeClr val="tx1"/>
+                </a:solidFill>
+                <a:effectLst/>
+                <a:latin typeface="Google Sans Text"/>
+              </a:rPr>
+              <a:t> (</a:t>
+            </a:r>
+            <a:r>
+              <a:rPr kumimoji="0" lang="en-US" altLang="en-US" sz="5400" b="0" i="0" u="none" strike="noStrike" cap="none" normalizeH="0" baseline="0" dirty="0">
+                <a:ln>
+                  <a:noFill/>
+                </a:ln>
+                <a:solidFill>
+                  <a:schemeClr val="tx1"/>
+                </a:solidFill>
+                <a:effectLst/>
+                <a:latin typeface="Google Sans Text"/>
+              </a:rPr>
+              <a:t>Normalized profitability across different price brackets).</a:t>
+            </a:r>
+          </a:p>
+          <a:p>
+            <a:pPr marL="0" marR="0" lvl="0" indent="0" algn="l" defTabSz="914400" rtl="0" eaLnBrk="0" fontAlgn="base" latinLnBrk="0" hangingPunct="0">
+              <a:lnSpc>
+                <a:spcPct val="100000"/>
+              </a:lnSpc>
+              <a:spcBef>
+                <a:spcPct val="0"/>
+              </a:spcBef>
+              <a:spcAft>
+                <a:spcPct val="0"/>
+              </a:spcAft>
+              <a:buClrTx/>
+              <a:buSzTx/>
+              <a:buFontTx/>
+              <a:buNone/>
+              <a:tabLst/>
+            </a:pPr>
+            <a:r>
+              <a:rPr kumimoji="0" lang="en-US" altLang="en-US" sz="5400" b="1" i="0" u="none" strike="noStrike" cap="none" normalizeH="0" baseline="0" dirty="0">
+                <a:ln>
+                  <a:noFill/>
+                </a:ln>
+                <a:solidFill>
+                  <a:schemeClr val="tx1"/>
+                </a:solidFill>
+                <a:effectLst/>
+                <a:latin typeface="Google Sans Text"/>
+              </a:rPr>
+              <a:t>3. Practical Application: "Using the Data"</a:t>
+            </a:r>
+            <a:endParaRPr kumimoji="0" lang="en-US" altLang="en-US" sz="5400" b="0" i="0" u="none" strike="noStrike" cap="none" normalizeH="0" baseline="0" dirty="0">
+              <a:ln>
+                <a:noFill/>
+              </a:ln>
+              <a:solidFill>
+                <a:schemeClr val="tx1"/>
+              </a:solidFill>
+              <a:effectLst/>
+            </a:endParaRPr>
+          </a:p>
+          <a:p>
+            <a:pPr marL="0" marR="0" lvl="0" indent="0" algn="l" defTabSz="914400" rtl="0" eaLnBrk="0" fontAlgn="base" latinLnBrk="0" hangingPunct="0">
+              <a:lnSpc>
+                <a:spcPct val="100000"/>
+              </a:lnSpc>
+              <a:spcBef>
+                <a:spcPct val="0"/>
+              </a:spcBef>
+              <a:spcAft>
+                <a:spcPct val="0"/>
+              </a:spcAft>
+              <a:buClrTx/>
+              <a:buSzTx/>
+              <a:buFontTx/>
+              <a:buChar char="•"/>
+              <a:tabLst/>
+            </a:pPr>
+            <a:r>
+              <a:rPr kumimoji="0" lang="en-US" altLang="en-US" sz="5400" b="1" i="0" u="none" strike="noStrike" cap="none" normalizeH="0" baseline="0" dirty="0">
+                <a:ln>
+                  <a:noFill/>
+                </a:ln>
+                <a:solidFill>
+                  <a:schemeClr val="tx1"/>
+                </a:solidFill>
+                <a:effectLst/>
+                <a:latin typeface="Google Sans Text"/>
+              </a:rPr>
+              <a:t>Market Distribution:</a:t>
+            </a:r>
+            <a:r>
+              <a:rPr kumimoji="0" lang="en-US" altLang="en-US" sz="5400" b="0" i="0" u="none" strike="noStrike" cap="none" normalizeH="0" baseline="0" dirty="0">
+                <a:ln>
+                  <a:noFill/>
+                </a:ln>
+                <a:solidFill>
+                  <a:schemeClr val="tx1"/>
+                </a:solidFill>
+                <a:effectLst/>
+                <a:latin typeface="Google Sans Text"/>
+              </a:rPr>
+              <a:t> Using the processed data to distinguish between the "efficient" F2P market and the "volatile" Members market.</a:t>
+            </a:r>
+          </a:p>
+          <a:p>
+            <a:pPr marL="0" marR="0" lvl="0" indent="0" algn="l" defTabSz="914400" rtl="0" eaLnBrk="0" fontAlgn="base" latinLnBrk="0" hangingPunct="0">
+              <a:lnSpc>
+                <a:spcPct val="100000"/>
+              </a:lnSpc>
+              <a:spcBef>
+                <a:spcPct val="0"/>
+              </a:spcBef>
+              <a:spcAft>
+                <a:spcPct val="0"/>
+              </a:spcAft>
+              <a:buClrTx/>
+              <a:buSzTx/>
+              <a:buFontTx/>
+              <a:buChar char="•"/>
+              <a:tabLst/>
+            </a:pPr>
+            <a:r>
+              <a:rPr kumimoji="0" lang="en-US" altLang="en-US" sz="5400" b="1" i="0" u="none" strike="noStrike" cap="none" normalizeH="0" baseline="0" dirty="0">
+                <a:ln>
+                  <a:noFill/>
+                </a:ln>
+                <a:solidFill>
+                  <a:schemeClr val="tx1"/>
+                </a:solidFill>
+                <a:effectLst/>
+                <a:latin typeface="Google Sans Text"/>
+              </a:rPr>
+              <a:t>Price Action Analysis:</a:t>
+            </a:r>
+            <a:r>
+              <a:rPr kumimoji="0" lang="en-US" altLang="en-US" sz="5400" b="0" i="0" u="none" strike="noStrike" cap="none" normalizeH="0" baseline="0" dirty="0">
+                <a:ln>
+                  <a:noFill/>
+                </a:ln>
+                <a:solidFill>
+                  <a:schemeClr val="tx1"/>
+                </a:solidFill>
+                <a:effectLst/>
+                <a:latin typeface="Google Sans Text"/>
+              </a:rPr>
+              <a:t> Utilizing the cleaned dataset to generate Candlestick charts and Quantile plots, allowing a data-driven trader to identify specific entry and exit windows based on liquidity.</a:t>
+            </a:r>
+          </a:p>
+          <a:p>
+            <a:pPr marL="0" marR="0" lvl="0" indent="0" algn="l" defTabSz="914400" rtl="0" eaLnBrk="0" fontAlgn="base" latinLnBrk="0" hangingPunct="0">
+              <a:lnSpc>
+                <a:spcPct val="100000"/>
+              </a:lnSpc>
+              <a:spcBef>
+                <a:spcPct val="0"/>
+              </a:spcBef>
+              <a:spcAft>
+                <a:spcPct val="0"/>
+              </a:spcAft>
+              <a:buClrTx/>
+              <a:buSzTx/>
+              <a:buFontTx/>
+              <a:buNone/>
+              <a:tabLst/>
+            </a:pPr>
+            <a:endParaRPr kumimoji="0" lang="en-US" altLang="en-US" sz="5400" b="0" i="0" u="none" strike="noStrike" cap="none" normalizeH="0" baseline="0" dirty="0">
+              <a:ln>
+                <a:noFill/>
+              </a:ln>
+              <a:solidFill>
+                <a:schemeClr val="tx1"/>
+              </a:solidFill>
+              <a:effectLst/>
+              <a:latin typeface="Arial" panose="020B0604020202020204" pitchFamily="34" charset="0"/>
+            </a:endParaRPr>
+          </a:p>
+        </p:txBody>
+      </p:sp>
     </p:spTree>
     <p:extLst>
       <p:ext uri="{BB962C8B-B14F-4D97-AF65-F5344CB8AC3E}">
